--- a/slides/13-text.pptx
+++ b/slides/13-text.pptx
@@ -5,35 +5,39 @@
     <p:sldMasterId id="2147483852" r:id="rId1"/>
   </p:sldMasterIdLst>
   <p:notesMasterIdLst>
-    <p:notesMasterId r:id="rId28"/>
+    <p:notesMasterId r:id="rId32"/>
   </p:notesMasterIdLst>
   <p:sldIdLst>
     <p:sldId id="256" r:id="rId2"/>
     <p:sldId id="257" r:id="rId3"/>
-    <p:sldId id="261" r:id="rId4"/>
-    <p:sldId id="262" r:id="rId5"/>
-    <p:sldId id="263" r:id="rId6"/>
-    <p:sldId id="264" r:id="rId7"/>
-    <p:sldId id="281" r:id="rId8"/>
-    <p:sldId id="265" r:id="rId9"/>
-    <p:sldId id="266" r:id="rId10"/>
-    <p:sldId id="267" r:id="rId11"/>
-    <p:sldId id="268" r:id="rId12"/>
-    <p:sldId id="269" r:id="rId13"/>
-    <p:sldId id="270" r:id="rId14"/>
-    <p:sldId id="271" r:id="rId15"/>
-    <p:sldId id="272" r:id="rId16"/>
-    <p:sldId id="273" r:id="rId17"/>
-    <p:sldId id="274" r:id="rId18"/>
-    <p:sldId id="275" r:id="rId19"/>
-    <p:sldId id="276" r:id="rId20"/>
-    <p:sldId id="277" r:id="rId21"/>
-    <p:sldId id="279" r:id="rId22"/>
-    <p:sldId id="282" r:id="rId23"/>
-    <p:sldId id="283" r:id="rId24"/>
-    <p:sldId id="284" r:id="rId25"/>
-    <p:sldId id="285" r:id="rId26"/>
-    <p:sldId id="280" r:id="rId27"/>
+    <p:sldId id="286" r:id="rId4"/>
+    <p:sldId id="287" r:id="rId5"/>
+    <p:sldId id="288" r:id="rId6"/>
+    <p:sldId id="261" r:id="rId7"/>
+    <p:sldId id="262" r:id="rId8"/>
+    <p:sldId id="263" r:id="rId9"/>
+    <p:sldId id="264" r:id="rId10"/>
+    <p:sldId id="289" r:id="rId11"/>
+    <p:sldId id="290" r:id="rId12"/>
+    <p:sldId id="291" r:id="rId13"/>
+    <p:sldId id="265" r:id="rId14"/>
+    <p:sldId id="267" r:id="rId15"/>
+    <p:sldId id="268" r:id="rId16"/>
+    <p:sldId id="269" r:id="rId17"/>
+    <p:sldId id="270" r:id="rId18"/>
+    <p:sldId id="271" r:id="rId19"/>
+    <p:sldId id="272" r:id="rId20"/>
+    <p:sldId id="273" r:id="rId21"/>
+    <p:sldId id="274" r:id="rId22"/>
+    <p:sldId id="275" r:id="rId23"/>
+    <p:sldId id="276" r:id="rId24"/>
+    <p:sldId id="277" r:id="rId25"/>
+    <p:sldId id="279" r:id="rId26"/>
+    <p:sldId id="282" r:id="rId27"/>
+    <p:sldId id="283" r:id="rId28"/>
+    <p:sldId id="284" r:id="rId29"/>
+    <p:sldId id="285" r:id="rId30"/>
+    <p:sldId id="280" r:id="rId31"/>
   </p:sldIdLst>
   <p:sldSz cx="12192000" cy="6858000"/>
   <p:notesSz cx="6858000" cy="9144000"/>
@@ -222,7 +226,7 @@
           <a:p>
             <a:fld id="{3CBB8A52-8AC5-C74C-97FB-632C448F3674}" type="datetimeFigureOut">
               <a:rPr lang="en-US" smtClean="0"/>
-              <a:t>4/16/25</a:t>
+              <a:t>12/1/25</a:t>
             </a:fld>
             <a:endParaRPr lang="en-US"/>
           </a:p>
@@ -598,7 +602,7 @@
   <p:cSld>
     <p:spTree>
       <p:nvGrpSpPr>
-        <p:cNvPr id="1" name="Shape 182"/>
+        <p:cNvPr id="1" name="Shape 175"/>
         <p:cNvGrpSpPr/>
         <p:nvPr/>
       </p:nvGrpSpPr>
@@ -612,7 +616,7 @@
       </p:grpSpPr>
       <p:sp>
         <p:nvSpPr>
-          <p:cNvPr id="183" name="Google Shape;183;p19:notes"/>
+          <p:cNvPr id="176" name="Google Shape;176;p18:notes"/>
           <p:cNvSpPr txBox="1">
             <a:spLocks noGrp="1"/>
           </p:cNvSpPr>
@@ -650,7 +654,7 @@
       </p:sp>
       <p:sp>
         <p:nvSpPr>
-          <p:cNvPr id="184" name="Google Shape;184;p19:notes"/>
+          <p:cNvPr id="177" name="Google Shape;177;p18:notes"/>
           <p:cNvSpPr>
             <a:spLocks noGrp="1" noRot="1" noChangeAspect="1"/>
           </p:cNvSpPr>
@@ -702,7 +706,7 @@
   <p:cSld>
     <p:spTree>
       <p:nvGrpSpPr>
-        <p:cNvPr id="1" name="Shape 195"/>
+        <p:cNvPr id="1" name="Shape 182"/>
         <p:cNvGrpSpPr/>
         <p:nvPr/>
       </p:nvGrpSpPr>
@@ -716,7 +720,7 @@
       </p:grpSpPr>
       <p:sp>
         <p:nvSpPr>
-          <p:cNvPr id="196" name="Google Shape;196;p20:notes"/>
+          <p:cNvPr id="183" name="Google Shape;183;p19:notes"/>
           <p:cNvSpPr txBox="1">
             <a:spLocks noGrp="1"/>
           </p:cNvSpPr>
@@ -754,7 +758,7 @@
       </p:sp>
       <p:sp>
         <p:nvSpPr>
-          <p:cNvPr id="197" name="Google Shape;197;p20:notes"/>
+          <p:cNvPr id="184" name="Google Shape;184;p19:notes"/>
           <p:cNvSpPr>
             <a:spLocks noGrp="1" noRot="1" noChangeAspect="1"/>
           </p:cNvSpPr>
@@ -806,7 +810,7 @@
   <p:cSld>
     <p:spTree>
       <p:nvGrpSpPr>
-        <p:cNvPr id="1" name="Shape 201"/>
+        <p:cNvPr id="1" name="Shape 195"/>
         <p:cNvGrpSpPr/>
         <p:nvPr/>
       </p:nvGrpSpPr>
@@ -820,7 +824,7 @@
       </p:grpSpPr>
       <p:sp>
         <p:nvSpPr>
-          <p:cNvPr id="202" name="Google Shape;202;p21:notes"/>
+          <p:cNvPr id="196" name="Google Shape;196;p20:notes"/>
           <p:cNvSpPr txBox="1">
             <a:spLocks noGrp="1"/>
           </p:cNvSpPr>
@@ -858,7 +862,7 @@
       </p:sp>
       <p:sp>
         <p:nvSpPr>
-          <p:cNvPr id="203" name="Google Shape;203;p21:notes"/>
+          <p:cNvPr id="197" name="Google Shape;197;p20:notes"/>
           <p:cNvSpPr>
             <a:spLocks noGrp="1" noRot="1" noChangeAspect="1"/>
           </p:cNvSpPr>
@@ -910,7 +914,7 @@
   <p:cSld>
     <p:spTree>
       <p:nvGrpSpPr>
-        <p:cNvPr id="1" name="Shape 217"/>
+        <p:cNvPr id="1" name="Shape 201"/>
         <p:cNvGrpSpPr/>
         <p:nvPr/>
       </p:nvGrpSpPr>
@@ -924,7 +928,7 @@
       </p:grpSpPr>
       <p:sp>
         <p:nvSpPr>
-          <p:cNvPr id="218" name="Google Shape;218;p22:notes"/>
+          <p:cNvPr id="202" name="Google Shape;202;p21:notes"/>
           <p:cNvSpPr txBox="1">
             <a:spLocks noGrp="1"/>
           </p:cNvSpPr>
@@ -962,7 +966,7 @@
       </p:sp>
       <p:sp>
         <p:nvSpPr>
-          <p:cNvPr id="219" name="Google Shape;219;p22:notes"/>
+          <p:cNvPr id="203" name="Google Shape;203;p21:notes"/>
           <p:cNvSpPr>
             <a:spLocks noGrp="1" noRot="1" noChangeAspect="1"/>
           </p:cNvSpPr>
@@ -1014,7 +1018,7 @@
   <p:cSld>
     <p:spTree>
       <p:nvGrpSpPr>
-        <p:cNvPr id="1" name="Shape 224"/>
+        <p:cNvPr id="1" name="Shape 217"/>
         <p:cNvGrpSpPr/>
         <p:nvPr/>
       </p:nvGrpSpPr>
@@ -1028,7 +1032,7 @@
       </p:grpSpPr>
       <p:sp>
         <p:nvSpPr>
-          <p:cNvPr id="225" name="Google Shape;225;p23:notes"/>
+          <p:cNvPr id="218" name="Google Shape;218;p22:notes"/>
           <p:cNvSpPr txBox="1">
             <a:spLocks noGrp="1"/>
           </p:cNvSpPr>
@@ -1066,7 +1070,7 @@
       </p:sp>
       <p:sp>
         <p:nvSpPr>
-          <p:cNvPr id="226" name="Google Shape;226;p23:notes"/>
+          <p:cNvPr id="219" name="Google Shape;219;p22:notes"/>
           <p:cNvSpPr>
             <a:spLocks noGrp="1" noRot="1" noChangeAspect="1"/>
           </p:cNvSpPr>
@@ -1118,7 +1122,7 @@
   <p:cSld>
     <p:spTree>
       <p:nvGrpSpPr>
-        <p:cNvPr id="1" name="Shape 231"/>
+        <p:cNvPr id="1" name="Shape 224"/>
         <p:cNvGrpSpPr/>
         <p:nvPr/>
       </p:nvGrpSpPr>
@@ -1132,7 +1136,7 @@
       </p:grpSpPr>
       <p:sp>
         <p:nvSpPr>
-          <p:cNvPr id="232" name="Google Shape;232;p24:notes"/>
+          <p:cNvPr id="225" name="Google Shape;225;p23:notes"/>
           <p:cNvSpPr txBox="1">
             <a:spLocks noGrp="1"/>
           </p:cNvSpPr>
@@ -1170,7 +1174,7 @@
       </p:sp>
       <p:sp>
         <p:nvSpPr>
-          <p:cNvPr id="233" name="Google Shape;233;p24:notes"/>
+          <p:cNvPr id="226" name="Google Shape;226;p23:notes"/>
           <p:cNvSpPr>
             <a:spLocks noGrp="1" noRot="1" noChangeAspect="1"/>
           </p:cNvSpPr>
@@ -1222,7 +1226,7 @@
   <p:cSld>
     <p:spTree>
       <p:nvGrpSpPr>
-        <p:cNvPr id="1" name="Shape 238"/>
+        <p:cNvPr id="1" name="Shape 231"/>
         <p:cNvGrpSpPr/>
         <p:nvPr/>
       </p:nvGrpSpPr>
@@ -1236,7 +1240,7 @@
       </p:grpSpPr>
       <p:sp>
         <p:nvSpPr>
-          <p:cNvPr id="239" name="Google Shape;239;p25:notes"/>
+          <p:cNvPr id="232" name="Google Shape;232;p24:notes"/>
           <p:cNvSpPr txBox="1">
             <a:spLocks noGrp="1"/>
           </p:cNvSpPr>
@@ -1274,7 +1278,7 @@
       </p:sp>
       <p:sp>
         <p:nvSpPr>
-          <p:cNvPr id="240" name="Google Shape;240;p25:notes"/>
+          <p:cNvPr id="233" name="Google Shape;233;p24:notes"/>
           <p:cNvSpPr>
             <a:spLocks noGrp="1" noRot="1" noChangeAspect="1"/>
           </p:cNvSpPr>
@@ -1326,7 +1330,7 @@
   <p:cSld>
     <p:spTree>
       <p:nvGrpSpPr>
-        <p:cNvPr id="1" name="Shape 244"/>
+        <p:cNvPr id="1" name="Shape 238"/>
         <p:cNvGrpSpPr/>
         <p:nvPr/>
       </p:nvGrpSpPr>
@@ -1340,7 +1344,7 @@
       </p:grpSpPr>
       <p:sp>
         <p:nvSpPr>
-          <p:cNvPr id="245" name="Google Shape;245;p26:notes"/>
+          <p:cNvPr id="239" name="Google Shape;239;p25:notes"/>
           <p:cNvSpPr txBox="1">
             <a:spLocks noGrp="1"/>
           </p:cNvSpPr>
@@ -1378,7 +1382,7 @@
       </p:sp>
       <p:sp>
         <p:nvSpPr>
-          <p:cNvPr id="246" name="Google Shape;246;p26:notes"/>
+          <p:cNvPr id="240" name="Google Shape;240;p25:notes"/>
           <p:cNvSpPr>
             <a:spLocks noGrp="1" noRot="1" noChangeAspect="1"/>
           </p:cNvSpPr>
@@ -1430,7 +1434,7 @@
   <p:cSld>
     <p:spTree>
       <p:nvGrpSpPr>
-        <p:cNvPr id="1" name="Shape 251"/>
+        <p:cNvPr id="1" name="Shape 244"/>
         <p:cNvGrpSpPr/>
         <p:nvPr/>
       </p:nvGrpSpPr>
@@ -1444,7 +1448,7 @@
       </p:grpSpPr>
       <p:sp>
         <p:nvSpPr>
-          <p:cNvPr id="252" name="Google Shape;252;p27:notes"/>
+          <p:cNvPr id="245" name="Google Shape;245;p26:notes"/>
           <p:cNvSpPr txBox="1">
             <a:spLocks noGrp="1"/>
           </p:cNvSpPr>
@@ -1476,28 +1480,13 @@
               </a:spcAft>
               <a:buNone/>
             </a:pPr>
-            <a:r>
-              <a:rPr lang="en-US" dirty="0"/>
-              <a:t>Pairs of words</a:t>
-            </a:r>
-          </a:p>
-          <a:p>
-            <a:pPr marL="0" lvl="0" indent="0" algn="l" rtl="0">
-              <a:spcBef>
-                <a:spcPts val="0"/>
-              </a:spcBef>
-              <a:spcAft>
-                <a:spcPts val="0"/>
-              </a:spcAft>
-              <a:buNone/>
-            </a:pPr>
-            <a:endParaRPr dirty="0"/>
-          </a:p>
-        </p:txBody>
-      </p:sp>
-      <p:sp>
-        <p:nvSpPr>
-          <p:cNvPr id="253" name="Google Shape;253;p27:notes"/>
+            <a:endParaRPr/>
+          </a:p>
+        </p:txBody>
+      </p:sp>
+      <p:sp>
+        <p:nvSpPr>
+          <p:cNvPr id="246" name="Google Shape;246;p26:notes"/>
           <p:cNvSpPr>
             <a:spLocks noGrp="1" noRot="1" noChangeAspect="1"/>
           </p:cNvSpPr>
@@ -1549,7 +1538,7 @@
   <p:cSld>
     <p:spTree>
       <p:nvGrpSpPr>
-        <p:cNvPr id="1" name="Shape 264"/>
+        <p:cNvPr id="1" name="Shape 251"/>
         <p:cNvGrpSpPr/>
         <p:nvPr/>
       </p:nvGrpSpPr>
@@ -1563,7 +1552,7 @@
       </p:grpSpPr>
       <p:sp>
         <p:nvSpPr>
-          <p:cNvPr id="265" name="Google Shape;265;p29:notes"/>
+          <p:cNvPr id="252" name="Google Shape;252;p27:notes"/>
           <p:cNvSpPr txBox="1">
             <a:spLocks noGrp="1"/>
           </p:cNvSpPr>
@@ -1595,13 +1584,28 @@
               </a:spcAft>
               <a:buNone/>
             </a:pPr>
-            <a:endParaRPr/>
-          </a:p>
-        </p:txBody>
-      </p:sp>
-      <p:sp>
-        <p:nvSpPr>
-          <p:cNvPr id="266" name="Google Shape;266;p29:notes"/>
+            <a:r>
+              <a:rPr lang="en-US" dirty="0"/>
+              <a:t>Pairs of words</a:t>
+            </a:r>
+          </a:p>
+          <a:p>
+            <a:pPr marL="0" lvl="0" indent="0" algn="l" rtl="0">
+              <a:spcBef>
+                <a:spcPts val="0"/>
+              </a:spcBef>
+              <a:spcAft>
+                <a:spcPts val="0"/>
+              </a:spcAft>
+              <a:buNone/>
+            </a:pPr>
+            <a:endParaRPr dirty="0"/>
+          </a:p>
+        </p:txBody>
+      </p:sp>
+      <p:sp>
+        <p:nvSpPr>
+          <p:cNvPr id="253" name="Google Shape;253;p27:notes"/>
           <p:cNvSpPr>
             <a:spLocks noGrp="1" noRot="1" noChangeAspect="1"/>
           </p:cNvSpPr>
@@ -1757,13 +1761,7 @@
   <p:cSld>
     <p:spTree>
       <p:nvGrpSpPr>
-        <p:cNvPr id="1" name="Shape 264">
-          <a:extLst>
-            <a:ext uri="{FF2B5EF4-FFF2-40B4-BE49-F238E27FC236}">
-              <a16:creationId xmlns:a16="http://schemas.microsoft.com/office/drawing/2014/main" id="{F1842E48-0FF6-FB27-26BB-418A8BEE8974}"/>
-            </a:ext>
-          </a:extLst>
-        </p:cNvPr>
+        <p:cNvPr id="1" name="Shape 264"/>
         <p:cNvGrpSpPr/>
         <p:nvPr/>
       </p:nvGrpSpPr>
@@ -1777,13 +1775,7 @@
       </p:grpSpPr>
       <p:sp>
         <p:nvSpPr>
-          <p:cNvPr id="265" name="Google Shape;265;p29:notes">
-            <a:extLst>
-              <a:ext uri="{FF2B5EF4-FFF2-40B4-BE49-F238E27FC236}">
-                <a16:creationId xmlns:a16="http://schemas.microsoft.com/office/drawing/2014/main" id="{47870C5E-2668-741A-1F1B-81F0E522306D}"/>
-              </a:ext>
-            </a:extLst>
-          </p:cNvPr>
+          <p:cNvPr id="265" name="Google Shape;265;p29:notes"/>
           <p:cNvSpPr txBox="1">
             <a:spLocks noGrp="1"/>
           </p:cNvSpPr>
@@ -1805,120 +1797,6 @@
             <a:noAutofit/>
           </a:bodyPr>
           <a:lstStyle/>
-          <a:p>
-            <a:pPr algn="l" rtl="0" fontAlgn="base">
-              <a:spcAft>
-                <a:spcPts val="750"/>
-              </a:spcAft>
-              <a:buNone/>
-            </a:pPr>
-            <a:r>
-              <a:rPr lang="en-US" b="0" i="0" u="sng" dirty="0">
-                <a:solidFill>
-                  <a:srgbClr val="FFFFFF"/>
-                </a:solidFill>
-                <a:effectLst/>
-                <a:latin typeface="Nunito" panose="020F0502020204030204" pitchFamily="34" charset="0"/>
-                <a:hlinkClick r:id="rId3"/>
-              </a:rPr>
-              <a:t>Bar charts</a:t>
-            </a:r>
-            <a:r>
-              <a:rPr lang="en-US" b="0" i="0" dirty="0">
-                <a:solidFill>
-                  <a:srgbClr val="FFFFFF"/>
-                </a:solidFill>
-                <a:effectLst/>
-                <a:latin typeface="Nunito" panose="020F0502020204030204" pitchFamily="34" charset="0"/>
-              </a:rPr>
-              <a:t> can be used to visualize the frequency of specific words or phrases in a text dataset. They provide a clear and precise comparison of word frequencies.</a:t>
-            </a:r>
-          </a:p>
-          <a:p>
-            <a:pPr algn="l" rtl="0" fontAlgn="base">
-              <a:spcAft>
-                <a:spcPts val="750"/>
-              </a:spcAft>
-              <a:buNone/>
-            </a:pPr>
-            <a:r>
-              <a:rPr lang="en-US" b="1" i="0" dirty="0">
-                <a:solidFill>
-                  <a:srgbClr val="FFFFFF"/>
-                </a:solidFill>
-                <a:effectLst/>
-                <a:latin typeface="Nunito" pitchFamily="2" charset="77"/>
-              </a:rPr>
-              <a:t>Use Cases</a:t>
-            </a:r>
-            <a:r>
-              <a:rPr lang="en-US" b="0" i="0" dirty="0">
-                <a:solidFill>
-                  <a:srgbClr val="FFFFFF"/>
-                </a:solidFill>
-                <a:effectLst/>
-                <a:latin typeface="Nunito" pitchFamily="2" charset="77"/>
-              </a:rPr>
-              <a:t>:</a:t>
-            </a:r>
-          </a:p>
-          <a:p>
-            <a:pPr algn="l" fontAlgn="base">
-              <a:spcAft>
-                <a:spcPts val="1800"/>
-              </a:spcAft>
-              <a:buFont typeface="Arial" panose="020B0604020202020204" pitchFamily="34" charset="0"/>
-              <a:buChar char="•"/>
-            </a:pPr>
-            <a:r>
-              <a:rPr lang="en-US" b="0" i="0" dirty="0">
-                <a:solidFill>
-                  <a:srgbClr val="FFFFFF"/>
-                </a:solidFill>
-                <a:effectLst/>
-                <a:latin typeface="Nunito" pitchFamily="2" charset="77"/>
-              </a:rPr>
-              <a:t>Comparing the frequency of keywords in different documents.</a:t>
-            </a:r>
-          </a:p>
-          <a:p>
-            <a:pPr algn="l" fontAlgn="base">
-              <a:spcAft>
-                <a:spcPts val="1800"/>
-              </a:spcAft>
-              <a:buFont typeface="Arial" panose="020B0604020202020204" pitchFamily="34" charset="0"/>
-              <a:buChar char="•"/>
-            </a:pPr>
-            <a:r>
-              <a:rPr lang="en-US" b="0" i="0" dirty="0">
-                <a:solidFill>
-                  <a:srgbClr val="FFFFFF"/>
-                </a:solidFill>
-                <a:effectLst/>
-                <a:latin typeface="Nunito" pitchFamily="2" charset="77"/>
-              </a:rPr>
-              <a:t>Analyzing the distribution of topics in a dataset.</a:t>
-            </a:r>
-          </a:p>
-          <a:p>
-            <a:pPr algn="l" fontAlgn="base">
-              <a:spcAft>
-                <a:spcPts val="1800"/>
-              </a:spcAft>
-              <a:buFont typeface="Arial" panose="020B0604020202020204" pitchFamily="34" charset="0"/>
-              <a:buChar char="•"/>
-            </a:pPr>
-            <a:r>
-              <a:rPr lang="en-US" b="0" i="0" dirty="0">
-                <a:solidFill>
-                  <a:srgbClr val="FFFFFF"/>
-                </a:solidFill>
-                <a:effectLst/>
-                <a:latin typeface="Nunito" pitchFamily="2" charset="77"/>
-              </a:rPr>
-              <a:t>Used to show the frequency of specific terms or categories within the text.</a:t>
-            </a:r>
-          </a:p>
           <a:p>
             <a:pPr marL="0" lvl="0" indent="0" algn="l" rtl="0">
               <a:spcBef>
@@ -1929,19 +1807,13 @@
               </a:spcAft>
               <a:buNone/>
             </a:pPr>
-            <a:endParaRPr dirty="0"/>
-          </a:p>
-        </p:txBody>
-      </p:sp>
-      <p:sp>
-        <p:nvSpPr>
-          <p:cNvPr id="266" name="Google Shape;266;p29:notes">
-            <a:extLst>
-              <a:ext uri="{FF2B5EF4-FFF2-40B4-BE49-F238E27FC236}">
-                <a16:creationId xmlns:a16="http://schemas.microsoft.com/office/drawing/2014/main" id="{36496494-8A74-D6B1-9D3C-DDCBA9EA4E70}"/>
-              </a:ext>
-            </a:extLst>
-          </p:cNvPr>
+            <a:endParaRPr/>
+          </a:p>
+        </p:txBody>
+      </p:sp>
+      <p:sp>
+        <p:nvSpPr>
+          <p:cNvPr id="266" name="Google Shape;266;p29:notes"/>
           <p:cNvSpPr>
             <a:spLocks noGrp="1" noRot="1" noChangeAspect="1"/>
           </p:cNvSpPr>
@@ -1981,11 +1853,6 @@
         </p:spPr>
       </p:sp>
     </p:spTree>
-    <p:extLst>
-      <p:ext uri="{BB962C8B-B14F-4D97-AF65-F5344CB8AC3E}">
-        <p14:creationId xmlns:p14="http://schemas.microsoft.com/office/powerpoint/2010/main" val="1171563658"/>
-      </p:ext>
-    </p:extLst>
   </p:cSld>
   <p:clrMapOvr>
     <a:masterClrMapping/>
@@ -2001,7 +1868,7 @@
         <p:cNvPr id="1" name="Shape 264">
           <a:extLst>
             <a:ext uri="{FF2B5EF4-FFF2-40B4-BE49-F238E27FC236}">
-              <a16:creationId xmlns:a16="http://schemas.microsoft.com/office/drawing/2014/main" id="{42A5ED17-0884-16D0-96EB-A88D009C2D44}"/>
+              <a16:creationId xmlns:a16="http://schemas.microsoft.com/office/drawing/2014/main" id="{F1842E48-0FF6-FB27-26BB-418A8BEE8974}"/>
             </a:ext>
           </a:extLst>
         </p:cNvPr>
@@ -2021,7 +1888,7 @@
           <p:cNvPr id="265" name="Google Shape;265;p29:notes">
             <a:extLst>
               <a:ext uri="{FF2B5EF4-FFF2-40B4-BE49-F238E27FC236}">
-                <a16:creationId xmlns:a16="http://schemas.microsoft.com/office/drawing/2014/main" id="{F0355AA5-B306-1D10-9285-B0B8995F2A18}"/>
+                <a16:creationId xmlns:a16="http://schemas.microsoft.com/office/drawing/2014/main" id="{47870C5E-2668-741A-1F1B-81F0E522306D}"/>
               </a:ext>
             </a:extLst>
           </p:cNvPr>
@@ -2053,6 +1920,45 @@
               </a:spcAft>
               <a:buNone/>
             </a:pPr>
+            <a:r>
+              <a:rPr lang="en-US" b="0" i="0" u="sng" dirty="0">
+                <a:solidFill>
+                  <a:srgbClr val="FFFFFF"/>
+                </a:solidFill>
+                <a:effectLst/>
+                <a:latin typeface="Nunito" panose="020F0502020204030204" pitchFamily="34" charset="0"/>
+                <a:hlinkClick r:id="rId3"/>
+              </a:rPr>
+              <a:t>Bar charts</a:t>
+            </a:r>
+            <a:r>
+              <a:rPr lang="en-US" b="0" i="0" dirty="0">
+                <a:solidFill>
+                  <a:srgbClr val="FFFFFF"/>
+                </a:solidFill>
+                <a:effectLst/>
+                <a:latin typeface="Nunito" panose="020F0502020204030204" pitchFamily="34" charset="0"/>
+              </a:rPr>
+              <a:t> can be used to visualize the frequency of specific words or phrases in a text dataset. They provide a clear and precise comparison of word frequencies.</a:t>
+            </a:r>
+          </a:p>
+          <a:p>
+            <a:pPr algn="l" rtl="0" fontAlgn="base">
+              <a:spcAft>
+                <a:spcPts val="750"/>
+              </a:spcAft>
+              <a:buNone/>
+            </a:pPr>
+            <a:r>
+              <a:rPr lang="en-US" b="1" i="0" dirty="0">
+                <a:solidFill>
+                  <a:srgbClr val="FFFFFF"/>
+                </a:solidFill>
+                <a:effectLst/>
+                <a:latin typeface="Nunito" pitchFamily="2" charset="77"/>
+              </a:rPr>
+              <a:t>Use Cases</a:t>
+            </a:r>
             <a:r>
               <a:rPr lang="en-US" b="0" i="0" dirty="0">
                 <a:solidFill>
@@ -2061,48 +1967,8 @@
                 <a:effectLst/>
                 <a:latin typeface="Nunito" pitchFamily="2" charset="77"/>
               </a:rPr>
-              <a:t>A Bigram Network is a visualization technique used to illustrate the relationships between pairs of words (bigrams) in a text dataset. This network graphically represents the most frequent pairs of words that appear consecutively in the text, with nodes representing words and edges representing the connections between them.</a:t>
-            </a:r>
-          </a:p>
-          <a:p>
-            <a:pPr algn="l" rtl="0" fontAlgn="base">
-              <a:spcAft>
-                <a:spcPts val="750"/>
-              </a:spcAft>
-              <a:buNone/>
-            </a:pPr>
-            <a:endParaRPr lang="en-US" b="0" i="0" dirty="0">
-              <a:solidFill>
-                <a:srgbClr val="FFFFFF"/>
-              </a:solidFill>
-              <a:effectLst/>
-              <a:latin typeface="Nunito" pitchFamily="2" charset="77"/>
-            </a:endParaRPr>
-          </a:p>
-          <a:p>
-            <a:pPr algn="l" rtl="0" fontAlgn="base">
-              <a:spcAft>
-                <a:spcPts val="750"/>
-              </a:spcAft>
-              <a:buNone/>
-            </a:pPr>
-            <a:r>
-              <a:rPr lang="en-US" b="1" i="0" dirty="0">
-                <a:solidFill>
-                  <a:srgbClr val="FFFFFF"/>
-                </a:solidFill>
-                <a:effectLst/>
-                <a:latin typeface="Nunito" pitchFamily="2" charset="77"/>
-              </a:rPr>
-              <a:t>Use Cases:</a:t>
-            </a:r>
-            <a:endParaRPr lang="en-US" b="0" i="0" dirty="0">
-              <a:solidFill>
-                <a:srgbClr val="FFFFFF"/>
-              </a:solidFill>
-              <a:effectLst/>
-              <a:latin typeface="Nunito" pitchFamily="2" charset="77"/>
-            </a:endParaRPr>
+              <a:t>:</a:t>
+            </a:r>
           </a:p>
           <a:p>
             <a:pPr algn="l" fontAlgn="base">
@@ -2120,7 +1986,7 @@
                 <a:effectLst/>
                 <a:latin typeface="Nunito" pitchFamily="2" charset="77"/>
               </a:rPr>
-              <a:t>Understanding the contextual relationship between words in large text datasets.</a:t>
+              <a:t>Comparing the frequency of keywords in different documents.</a:t>
             </a:r>
           </a:p>
           <a:p>
@@ -2139,7 +2005,7 @@
                 <a:effectLst/>
                 <a:latin typeface="Nunito" pitchFamily="2" charset="77"/>
               </a:rPr>
-              <a:t>Analyzing patterns in customer feedback or social media posts to identify common themes or issues.</a:t>
+              <a:t>Analyzing the distribution of topics in a dataset.</a:t>
             </a:r>
           </a:p>
           <a:p>
@@ -2158,7 +2024,7 @@
                 <a:effectLst/>
                 <a:latin typeface="Nunito" pitchFamily="2" charset="77"/>
               </a:rPr>
-              <a:t>Exploring text data from research articles, books, or any large corpus to discover hidden connections.</a:t>
+              <a:t>Used to show the frequency of specific terms or categories within the text.</a:t>
             </a:r>
           </a:p>
           <a:p>
@@ -2180,7 +2046,7 @@
           <p:cNvPr id="266" name="Google Shape;266;p29:notes">
             <a:extLst>
               <a:ext uri="{FF2B5EF4-FFF2-40B4-BE49-F238E27FC236}">
-                <a16:creationId xmlns:a16="http://schemas.microsoft.com/office/drawing/2014/main" id="{81DFD63A-CABB-862C-0EE8-31C77AA395C7}"/>
+                <a16:creationId xmlns:a16="http://schemas.microsoft.com/office/drawing/2014/main" id="{36496494-8A74-D6B1-9D3C-DDCBA9EA4E70}"/>
               </a:ext>
             </a:extLst>
           </p:cNvPr>
@@ -2225,7 +2091,7 @@
     </p:spTree>
     <p:extLst>
       <p:ext uri="{BB962C8B-B14F-4D97-AF65-F5344CB8AC3E}">
-        <p14:creationId xmlns:p14="http://schemas.microsoft.com/office/powerpoint/2010/main" val="2508632540"/>
+        <p14:creationId xmlns:p14="http://schemas.microsoft.com/office/powerpoint/2010/main" val="1171563658"/>
       </p:ext>
     </p:extLst>
   </p:cSld>
@@ -2243,7 +2109,7 @@
         <p:cNvPr id="1" name="Shape 264">
           <a:extLst>
             <a:ext uri="{FF2B5EF4-FFF2-40B4-BE49-F238E27FC236}">
-              <a16:creationId xmlns:a16="http://schemas.microsoft.com/office/drawing/2014/main" id="{7A6AAB4B-E94B-23E1-AE13-F476897BCC87}"/>
+              <a16:creationId xmlns:a16="http://schemas.microsoft.com/office/drawing/2014/main" id="{42A5ED17-0884-16D0-96EB-A88D009C2D44}"/>
             </a:ext>
           </a:extLst>
         </p:cNvPr>
@@ -2263,7 +2129,7 @@
           <p:cNvPr id="265" name="Google Shape;265;p29:notes">
             <a:extLst>
               <a:ext uri="{FF2B5EF4-FFF2-40B4-BE49-F238E27FC236}">
-                <a16:creationId xmlns:a16="http://schemas.microsoft.com/office/drawing/2014/main" id="{59D4C4AF-CE5B-C9A3-D54E-400F9716B315}"/>
+                <a16:creationId xmlns:a16="http://schemas.microsoft.com/office/drawing/2014/main" id="{F0355AA5-B306-1D10-9285-B0B8995F2A18}"/>
               </a:ext>
             </a:extLst>
           </p:cNvPr>
@@ -2303,7 +2169,7 @@
                 <a:effectLst/>
                 <a:latin typeface="Nunito" pitchFamily="2" charset="77"/>
               </a:rPr>
-              <a:t>A Word Frequency Distribution Plot is a graphical representation that shows how frequently different words appear in a text dataset. It typically displays words on the x-axis and their corresponding frequencies on the y-axis. This plot helps in understanding the distribution of words in the text, identifying the most common words, and observing the overall frequency pattern.</a:t>
+              <a:t>A Bigram Network is a visualization technique used to illustrate the relationships between pairs of words (bigrams) in a text dataset. This network graphically represents the most frequent pairs of words that appear consecutively in the text, with nodes representing words and edges representing the connections between them.</a:t>
             </a:r>
           </a:p>
           <a:p>
@@ -2313,16 +2179,6 @@
               </a:spcAft>
               <a:buNone/>
             </a:pPr>
-            <a:r>
-              <a:rPr lang="en-US" b="1" i="0" dirty="0">
-                <a:solidFill>
-                  <a:srgbClr val="FFFFFF"/>
-                </a:solidFill>
-                <a:effectLst/>
-                <a:latin typeface="Nunito" pitchFamily="2" charset="77"/>
-              </a:rPr>
-              <a:t>Use Cases:</a:t>
-            </a:r>
             <a:endParaRPr lang="en-US" b="0" i="0" dirty="0">
               <a:solidFill>
                 <a:srgbClr val="FFFFFF"/>
@@ -2332,6 +2188,31 @@
             </a:endParaRPr>
           </a:p>
           <a:p>
+            <a:pPr algn="l" rtl="0" fontAlgn="base">
+              <a:spcAft>
+                <a:spcPts val="750"/>
+              </a:spcAft>
+              <a:buNone/>
+            </a:pPr>
+            <a:r>
+              <a:rPr lang="en-US" b="1" i="0" dirty="0">
+                <a:solidFill>
+                  <a:srgbClr val="FFFFFF"/>
+                </a:solidFill>
+                <a:effectLst/>
+                <a:latin typeface="Nunito" pitchFamily="2" charset="77"/>
+              </a:rPr>
+              <a:t>Use Cases:</a:t>
+            </a:r>
+            <a:endParaRPr lang="en-US" b="0" i="0" dirty="0">
+              <a:solidFill>
+                <a:srgbClr val="FFFFFF"/>
+              </a:solidFill>
+              <a:effectLst/>
+              <a:latin typeface="Nunito" pitchFamily="2" charset="77"/>
+            </a:endParaRPr>
+          </a:p>
+          <a:p>
             <a:pPr algn="l" fontAlgn="base">
               <a:spcAft>
                 <a:spcPts val="1800"/>
@@ -2347,7 +2228,7 @@
                 <a:effectLst/>
                 <a:latin typeface="Nunito" pitchFamily="2" charset="77"/>
               </a:rPr>
-              <a:t>Analyzing the vocabulary usage in a text dataset.</a:t>
+              <a:t>Understanding the contextual relationship between words in large text datasets.</a:t>
             </a:r>
           </a:p>
           <a:p>
@@ -2366,7 +2247,7 @@
                 <a:effectLst/>
                 <a:latin typeface="Nunito" pitchFamily="2" charset="77"/>
               </a:rPr>
-              <a:t>Identifying the most important words in customer feedback or social media posts.</a:t>
+              <a:t>Analyzing patterns in customer feedback or social media posts to identify common themes or issues.</a:t>
             </a:r>
           </a:p>
           <a:p>
@@ -2385,7 +2266,7 @@
                 <a:effectLst/>
                 <a:latin typeface="Nunito" pitchFamily="2" charset="77"/>
               </a:rPr>
-              <a:t>Comparing word frequencies across different texts or corpora.</a:t>
+              <a:t>Exploring text data from research articles, books, or any large corpus to discover hidden connections.</a:t>
             </a:r>
           </a:p>
           <a:p>
@@ -2407,7 +2288,7 @@
           <p:cNvPr id="266" name="Google Shape;266;p29:notes">
             <a:extLst>
               <a:ext uri="{FF2B5EF4-FFF2-40B4-BE49-F238E27FC236}">
-                <a16:creationId xmlns:a16="http://schemas.microsoft.com/office/drawing/2014/main" id="{FE07D19C-7E2C-9513-2F18-D9CE38E5683B}"/>
+                <a16:creationId xmlns:a16="http://schemas.microsoft.com/office/drawing/2014/main" id="{81DFD63A-CABB-862C-0EE8-31C77AA395C7}"/>
               </a:ext>
             </a:extLst>
           </p:cNvPr>
@@ -2452,7 +2333,7 @@
     </p:spTree>
     <p:extLst>
       <p:ext uri="{BB962C8B-B14F-4D97-AF65-F5344CB8AC3E}">
-        <p14:creationId xmlns:p14="http://schemas.microsoft.com/office/powerpoint/2010/main" val="732817410"/>
+        <p14:creationId xmlns:p14="http://schemas.microsoft.com/office/powerpoint/2010/main" val="2508632540"/>
       </p:ext>
     </p:extLst>
   </p:cSld>
@@ -2470,7 +2351,7 @@
         <p:cNvPr id="1" name="Shape 264">
           <a:extLst>
             <a:ext uri="{FF2B5EF4-FFF2-40B4-BE49-F238E27FC236}">
-              <a16:creationId xmlns:a16="http://schemas.microsoft.com/office/drawing/2014/main" id="{88189232-4C08-4071-D4D8-AC93E48CE645}"/>
+              <a16:creationId xmlns:a16="http://schemas.microsoft.com/office/drawing/2014/main" id="{7A6AAB4B-E94B-23E1-AE13-F476897BCC87}"/>
             </a:ext>
           </a:extLst>
         </p:cNvPr>
@@ -2490,7 +2371,7 @@
           <p:cNvPr id="265" name="Google Shape;265;p29:notes">
             <a:extLst>
               <a:ext uri="{FF2B5EF4-FFF2-40B4-BE49-F238E27FC236}">
-                <a16:creationId xmlns:a16="http://schemas.microsoft.com/office/drawing/2014/main" id="{AB5AF3E3-9313-0481-9D89-943DE9FFEB65}"/>
+                <a16:creationId xmlns:a16="http://schemas.microsoft.com/office/drawing/2014/main" id="{59D4C4AF-CE5B-C9A3-D54E-400F9716B315}"/>
               </a:ext>
             </a:extLst>
           </p:cNvPr>
@@ -2530,7 +2411,7 @@
                 <a:effectLst/>
                 <a:latin typeface="Nunito" pitchFamily="2" charset="77"/>
               </a:rPr>
-              <a:t>Network graphs visualize the relationships between words or entities in a text dataset. Nodes represent words or entities, and edges represent the relationships between them.</a:t>
+              <a:t>A Word Frequency Distribution Plot is a graphical representation that shows how frequently different words appear in a text dataset. It typically displays words on the x-axis and their corresponding frequencies on the y-axis. This plot helps in understanding the distribution of words in the text, identifying the most common words, and observing the overall frequency pattern.</a:t>
             </a:r>
           </a:p>
           <a:p>
@@ -2548,8 +2429,24 @@
                 <a:effectLst/>
                 <a:latin typeface="Nunito" pitchFamily="2" charset="77"/>
               </a:rPr>
-              <a:t>Use Cases</a:t>
-            </a:r>
+              <a:t>Use Cases:</a:t>
+            </a:r>
+            <a:endParaRPr lang="en-US" b="0" i="0" dirty="0">
+              <a:solidFill>
+                <a:srgbClr val="FFFFFF"/>
+              </a:solidFill>
+              <a:effectLst/>
+              <a:latin typeface="Nunito" pitchFamily="2" charset="77"/>
+            </a:endParaRPr>
+          </a:p>
+          <a:p>
+            <a:pPr algn="l" fontAlgn="base">
+              <a:spcAft>
+                <a:spcPts val="1800"/>
+              </a:spcAft>
+              <a:buFont typeface="Arial" panose="020B0604020202020204" pitchFamily="34" charset="0"/>
+              <a:buChar char="•"/>
+            </a:pPr>
             <a:r>
               <a:rPr lang="en-US" b="0" i="0" dirty="0">
                 <a:solidFill>
@@ -2558,7 +2455,7 @@
                 <a:effectLst/>
                 <a:latin typeface="Nunito" pitchFamily="2" charset="77"/>
               </a:rPr>
-              <a:t>:</a:t>
+              <a:t>Analyzing the vocabulary usage in a text dataset.</a:t>
             </a:r>
           </a:p>
           <a:p>
@@ -2577,7 +2474,7 @@
                 <a:effectLst/>
                 <a:latin typeface="Nunito" pitchFamily="2" charset="77"/>
               </a:rPr>
-              <a:t>Analyzing co-occurrence of words in a text.</a:t>
+              <a:t>Identifying the most important words in customer feedback or social media posts.</a:t>
             </a:r>
           </a:p>
           <a:p>
@@ -2596,7 +2493,7 @@
                 <a:effectLst/>
                 <a:latin typeface="Nunito" pitchFamily="2" charset="77"/>
               </a:rPr>
-              <a:t>Exploring relationships between entities in a document.</a:t>
+              <a:t>Comparing word frequencies across different texts or corpora.</a:t>
             </a:r>
           </a:p>
           <a:p>
@@ -2618,7 +2515,7 @@
           <p:cNvPr id="266" name="Google Shape;266;p29:notes">
             <a:extLst>
               <a:ext uri="{FF2B5EF4-FFF2-40B4-BE49-F238E27FC236}">
-                <a16:creationId xmlns:a16="http://schemas.microsoft.com/office/drawing/2014/main" id="{60300550-FACF-6300-4ABC-23AF65628176}"/>
+                <a16:creationId xmlns:a16="http://schemas.microsoft.com/office/drawing/2014/main" id="{FE07D19C-7E2C-9513-2F18-D9CE38E5683B}"/>
               </a:ext>
             </a:extLst>
           </p:cNvPr>
@@ -2663,6 +2560,217 @@
     </p:spTree>
     <p:extLst>
       <p:ext uri="{BB962C8B-B14F-4D97-AF65-F5344CB8AC3E}">
+        <p14:creationId xmlns:p14="http://schemas.microsoft.com/office/powerpoint/2010/main" val="732817410"/>
+      </p:ext>
+    </p:extLst>
+  </p:cSld>
+  <p:clrMapOvr>
+    <a:masterClrMapping/>
+  </p:clrMapOvr>
+</p:notes>
+</file>
+
+<file path=ppt/notesSlides/notesSlide24.xml><?xml version="1.0" encoding="utf-8"?>
+<p:notes xmlns:a="http://schemas.openxmlformats.org/drawingml/2006/main" xmlns:r="http://schemas.openxmlformats.org/officeDocument/2006/relationships" xmlns:p="http://schemas.openxmlformats.org/presentationml/2006/main" showMasterSp="0" showMasterPhAnim="0">
+  <p:cSld>
+    <p:spTree>
+      <p:nvGrpSpPr>
+        <p:cNvPr id="1" name="Shape 264">
+          <a:extLst>
+            <a:ext uri="{FF2B5EF4-FFF2-40B4-BE49-F238E27FC236}">
+              <a16:creationId xmlns:a16="http://schemas.microsoft.com/office/drawing/2014/main" id="{88189232-4C08-4071-D4D8-AC93E48CE645}"/>
+            </a:ext>
+          </a:extLst>
+        </p:cNvPr>
+        <p:cNvGrpSpPr/>
+        <p:nvPr/>
+      </p:nvGrpSpPr>
+      <p:grpSpPr>
+        <a:xfrm>
+          <a:off x="0" y="0"/>
+          <a:ext cx="0" cy="0"/>
+          <a:chOff x="0" y="0"/>
+          <a:chExt cx="0" cy="0"/>
+        </a:xfrm>
+      </p:grpSpPr>
+      <p:sp>
+        <p:nvSpPr>
+          <p:cNvPr id="265" name="Google Shape;265;p29:notes">
+            <a:extLst>
+              <a:ext uri="{FF2B5EF4-FFF2-40B4-BE49-F238E27FC236}">
+                <a16:creationId xmlns:a16="http://schemas.microsoft.com/office/drawing/2014/main" id="{AB5AF3E3-9313-0481-9D89-943DE9FFEB65}"/>
+              </a:ext>
+            </a:extLst>
+          </p:cNvPr>
+          <p:cNvSpPr txBox="1">
+            <a:spLocks noGrp="1"/>
+          </p:cNvSpPr>
+          <p:nvPr>
+            <p:ph type="body" idx="1"/>
+          </p:nvPr>
+        </p:nvSpPr>
+        <p:spPr>
+          <a:xfrm>
+            <a:off x="685800" y="4343400"/>
+            <a:ext cx="5486400" cy="4114800"/>
+          </a:xfrm>
+          <a:prstGeom prst="rect">
+            <a:avLst/>
+          </a:prstGeom>
+        </p:spPr>
+        <p:txBody>
+          <a:bodyPr spcFirstLastPara="1" wrap="square" lIns="91425" tIns="91425" rIns="91425" bIns="91425" anchor="t" anchorCtr="0">
+            <a:noAutofit/>
+          </a:bodyPr>
+          <a:lstStyle/>
+          <a:p>
+            <a:pPr algn="l" rtl="0" fontAlgn="base">
+              <a:spcAft>
+                <a:spcPts val="750"/>
+              </a:spcAft>
+              <a:buNone/>
+            </a:pPr>
+            <a:r>
+              <a:rPr lang="en-US" b="0" i="0" dirty="0">
+                <a:solidFill>
+                  <a:srgbClr val="FFFFFF"/>
+                </a:solidFill>
+                <a:effectLst/>
+                <a:latin typeface="Nunito" pitchFamily="2" charset="77"/>
+              </a:rPr>
+              <a:t>Network graphs visualize the relationships between words or entities in a text dataset. Nodes represent words or entities, and edges represent the relationships between them.</a:t>
+            </a:r>
+          </a:p>
+          <a:p>
+            <a:pPr algn="l" rtl="0" fontAlgn="base">
+              <a:spcAft>
+                <a:spcPts val="750"/>
+              </a:spcAft>
+              <a:buNone/>
+            </a:pPr>
+            <a:r>
+              <a:rPr lang="en-US" b="1" i="0" dirty="0">
+                <a:solidFill>
+                  <a:srgbClr val="FFFFFF"/>
+                </a:solidFill>
+                <a:effectLst/>
+                <a:latin typeface="Nunito" pitchFamily="2" charset="77"/>
+              </a:rPr>
+              <a:t>Use Cases</a:t>
+            </a:r>
+            <a:r>
+              <a:rPr lang="en-US" b="0" i="0" dirty="0">
+                <a:solidFill>
+                  <a:srgbClr val="FFFFFF"/>
+                </a:solidFill>
+                <a:effectLst/>
+                <a:latin typeface="Nunito" pitchFamily="2" charset="77"/>
+              </a:rPr>
+              <a:t>:</a:t>
+            </a:r>
+          </a:p>
+          <a:p>
+            <a:pPr algn="l" fontAlgn="base">
+              <a:spcAft>
+                <a:spcPts val="1800"/>
+              </a:spcAft>
+              <a:buFont typeface="Arial" panose="020B0604020202020204" pitchFamily="34" charset="0"/>
+              <a:buChar char="•"/>
+            </a:pPr>
+            <a:r>
+              <a:rPr lang="en-US" b="0" i="0" dirty="0">
+                <a:solidFill>
+                  <a:srgbClr val="FFFFFF"/>
+                </a:solidFill>
+                <a:effectLst/>
+                <a:latin typeface="Nunito" pitchFamily="2" charset="77"/>
+              </a:rPr>
+              <a:t>Analyzing co-occurrence of words in a text.</a:t>
+            </a:r>
+          </a:p>
+          <a:p>
+            <a:pPr algn="l" fontAlgn="base">
+              <a:spcAft>
+                <a:spcPts val="1800"/>
+              </a:spcAft>
+              <a:buFont typeface="Arial" panose="020B0604020202020204" pitchFamily="34" charset="0"/>
+              <a:buChar char="•"/>
+            </a:pPr>
+            <a:r>
+              <a:rPr lang="en-US" b="0" i="0" dirty="0">
+                <a:solidFill>
+                  <a:srgbClr val="FFFFFF"/>
+                </a:solidFill>
+                <a:effectLst/>
+                <a:latin typeface="Nunito" pitchFamily="2" charset="77"/>
+              </a:rPr>
+              <a:t>Exploring relationships between entities in a document.</a:t>
+            </a:r>
+          </a:p>
+          <a:p>
+            <a:pPr marL="0" lvl="0" indent="0" algn="l" rtl="0">
+              <a:spcBef>
+                <a:spcPts val="0"/>
+              </a:spcBef>
+              <a:spcAft>
+                <a:spcPts val="0"/>
+              </a:spcAft>
+              <a:buNone/>
+            </a:pPr>
+            <a:endParaRPr dirty="0"/>
+          </a:p>
+        </p:txBody>
+      </p:sp>
+      <p:sp>
+        <p:nvSpPr>
+          <p:cNvPr id="266" name="Google Shape;266;p29:notes">
+            <a:extLst>
+              <a:ext uri="{FF2B5EF4-FFF2-40B4-BE49-F238E27FC236}">
+                <a16:creationId xmlns:a16="http://schemas.microsoft.com/office/drawing/2014/main" id="{60300550-FACF-6300-4ABC-23AF65628176}"/>
+              </a:ext>
+            </a:extLst>
+          </p:cNvPr>
+          <p:cNvSpPr>
+            <a:spLocks noGrp="1" noRot="1" noChangeAspect="1"/>
+          </p:cNvSpPr>
+          <p:nvPr>
+            <p:ph type="sldImg" idx="2"/>
+          </p:nvPr>
+        </p:nvSpPr>
+        <p:spPr>
+          <a:xfrm>
+            <a:off x="381000" y="685800"/>
+            <a:ext cx="6096000" cy="3429000"/>
+          </a:xfrm>
+          <a:custGeom>
+            <a:avLst/>
+            <a:gdLst/>
+            <a:ahLst/>
+            <a:cxnLst/>
+            <a:rect l="l" t="t" r="r" b="b"/>
+            <a:pathLst>
+              <a:path w="120000" h="120000" extrusionOk="0">
+                <a:moveTo>
+                  <a:pt x="0" y="0"/>
+                </a:moveTo>
+                <a:lnTo>
+                  <a:pt x="120000" y="0"/>
+                </a:lnTo>
+                <a:lnTo>
+                  <a:pt x="120000" y="120000"/>
+                </a:lnTo>
+                <a:lnTo>
+                  <a:pt x="0" y="120000"/>
+                </a:lnTo>
+                <a:close/>
+              </a:path>
+            </a:pathLst>
+          </a:custGeom>
+        </p:spPr>
+      </p:sp>
+    </p:spTree>
+    <p:extLst>
+      <p:ext uri="{BB962C8B-B14F-4D97-AF65-F5344CB8AC3E}">
         <p14:creationId xmlns:p14="http://schemas.microsoft.com/office/powerpoint/2010/main" val="195698681"/>
       </p:ext>
     </p:extLst>
@@ -2673,7 +2781,7 @@
 </p:notes>
 </file>
 
-<file path=ppt/notesSlides/notesSlide24.xml><?xml version="1.0" encoding="utf-8"?>
+<file path=ppt/notesSlides/notesSlide25.xml><?xml version="1.0" encoding="utf-8"?>
 <p:notes xmlns:a="http://schemas.openxmlformats.org/drawingml/2006/main" xmlns:r="http://schemas.openxmlformats.org/officeDocument/2006/relationships" xmlns:p="http://schemas.openxmlformats.org/presentationml/2006/main" showMasterSp="0" showMasterPhAnim="0">
   <p:cSld>
     <p:spTree>
@@ -2993,7 +3101,7 @@
         <p:cNvPr id="1" name="Shape 147">
           <a:extLst>
             <a:ext uri="{FF2B5EF4-FFF2-40B4-BE49-F238E27FC236}">
-              <a16:creationId xmlns:a16="http://schemas.microsoft.com/office/drawing/2014/main" id="{485AC059-08E0-FEE3-35CE-4FFA5D1E169B}"/>
+              <a16:creationId xmlns:a16="http://schemas.microsoft.com/office/drawing/2014/main" id="{0DC74871-4AD2-8E50-6152-90D8F6E0188F}"/>
             </a:ext>
           </a:extLst>
         </p:cNvPr>
@@ -3013,7 +3121,7 @@
           <p:cNvPr id="148" name="Google Shape;148;p14:notes">
             <a:extLst>
               <a:ext uri="{FF2B5EF4-FFF2-40B4-BE49-F238E27FC236}">
-                <a16:creationId xmlns:a16="http://schemas.microsoft.com/office/drawing/2014/main" id="{D41915F3-2BA6-BCB8-AE72-76951FB4D537}"/>
+                <a16:creationId xmlns:a16="http://schemas.microsoft.com/office/drawing/2014/main" id="{58420B5C-E7BE-868B-BD93-FBBBD00093B8}"/>
               </a:ext>
             </a:extLst>
           </p:cNvPr>
@@ -3057,7 +3165,7 @@
           <p:cNvPr id="149" name="Google Shape;149;p14:notes">
             <a:extLst>
               <a:ext uri="{FF2B5EF4-FFF2-40B4-BE49-F238E27FC236}">
-                <a16:creationId xmlns:a16="http://schemas.microsoft.com/office/drawing/2014/main" id="{E983DD50-CA97-643F-0754-9A209FCB45D1}"/>
+                <a16:creationId xmlns:a16="http://schemas.microsoft.com/office/drawing/2014/main" id="{49FBBB52-3574-8E9B-FF91-80DFAF03039A}"/>
               </a:ext>
             </a:extLst>
           </p:cNvPr>
@@ -3102,7 +3210,7 @@
     </p:spTree>
     <p:extLst>
       <p:ext uri="{BB962C8B-B14F-4D97-AF65-F5344CB8AC3E}">
-        <p14:creationId xmlns:p14="http://schemas.microsoft.com/office/powerpoint/2010/main" val="1557528229"/>
+        <p14:creationId xmlns:p14="http://schemas.microsoft.com/office/powerpoint/2010/main" val="3448021059"/>
       </p:ext>
     </p:extLst>
   </p:cSld>
@@ -3117,7 +3225,13 @@
   <p:cSld>
     <p:spTree>
       <p:nvGrpSpPr>
-        <p:cNvPr id="1" name="Shape 154"/>
+        <p:cNvPr id="1" name="Shape 147">
+          <a:extLst>
+            <a:ext uri="{FF2B5EF4-FFF2-40B4-BE49-F238E27FC236}">
+              <a16:creationId xmlns:a16="http://schemas.microsoft.com/office/drawing/2014/main" id="{784DD6B6-EEC6-3BCA-49E3-F20944DAA625}"/>
+            </a:ext>
+          </a:extLst>
+        </p:cNvPr>
         <p:cNvGrpSpPr/>
         <p:nvPr/>
       </p:nvGrpSpPr>
@@ -3131,7 +3245,13 @@
       </p:grpSpPr>
       <p:sp>
         <p:nvSpPr>
-          <p:cNvPr id="155" name="Google Shape;155;p15:notes"/>
+          <p:cNvPr id="148" name="Google Shape;148;p14:notes">
+            <a:extLst>
+              <a:ext uri="{FF2B5EF4-FFF2-40B4-BE49-F238E27FC236}">
+                <a16:creationId xmlns:a16="http://schemas.microsoft.com/office/drawing/2014/main" id="{77F82006-1779-CD12-5A6C-7A9CBA3C172C}"/>
+              </a:ext>
+            </a:extLst>
+          </p:cNvPr>
           <p:cNvSpPr txBox="1">
             <a:spLocks noGrp="1"/>
           </p:cNvSpPr>
@@ -3169,7 +3289,13 @@
       </p:sp>
       <p:sp>
         <p:nvSpPr>
-          <p:cNvPr id="156" name="Google Shape;156;p15:notes"/>
+          <p:cNvPr id="149" name="Google Shape;149;p14:notes">
+            <a:extLst>
+              <a:ext uri="{FF2B5EF4-FFF2-40B4-BE49-F238E27FC236}">
+                <a16:creationId xmlns:a16="http://schemas.microsoft.com/office/drawing/2014/main" id="{25CA136E-055B-3127-60C4-41F67448B561}"/>
+              </a:ext>
+            </a:extLst>
+          </p:cNvPr>
           <p:cNvSpPr>
             <a:spLocks noGrp="1" noRot="1" noChangeAspect="1"/>
           </p:cNvSpPr>
@@ -3209,6 +3335,11 @@
         </p:spPr>
       </p:sp>
     </p:spTree>
+    <p:extLst>
+      <p:ext uri="{BB962C8B-B14F-4D97-AF65-F5344CB8AC3E}">
+        <p14:creationId xmlns:p14="http://schemas.microsoft.com/office/powerpoint/2010/main" val="314161360"/>
+      </p:ext>
+    </p:extLst>
   </p:cSld>
   <p:clrMapOvr>
     <a:masterClrMapping/>
@@ -3221,7 +3352,13 @@
   <p:cSld>
     <p:spTree>
       <p:nvGrpSpPr>
-        <p:cNvPr id="1" name="Shape 162"/>
+        <p:cNvPr id="1" name="Shape 147">
+          <a:extLst>
+            <a:ext uri="{FF2B5EF4-FFF2-40B4-BE49-F238E27FC236}">
+              <a16:creationId xmlns:a16="http://schemas.microsoft.com/office/drawing/2014/main" id="{1B73102C-39B7-5B8D-8A64-8D1D32836CEA}"/>
+            </a:ext>
+          </a:extLst>
+        </p:cNvPr>
         <p:cNvGrpSpPr/>
         <p:nvPr/>
       </p:nvGrpSpPr>
@@ -3235,7 +3372,13 @@
       </p:grpSpPr>
       <p:sp>
         <p:nvSpPr>
-          <p:cNvPr id="163" name="Google Shape;163;p16:notes"/>
+          <p:cNvPr id="148" name="Google Shape;148;p14:notes">
+            <a:extLst>
+              <a:ext uri="{FF2B5EF4-FFF2-40B4-BE49-F238E27FC236}">
+                <a16:creationId xmlns:a16="http://schemas.microsoft.com/office/drawing/2014/main" id="{B6DEA307-EDFE-41E3-DF51-BE3AC126BA1D}"/>
+              </a:ext>
+            </a:extLst>
+          </p:cNvPr>
           <p:cNvSpPr txBox="1">
             <a:spLocks noGrp="1"/>
           </p:cNvSpPr>
@@ -3273,7 +3416,13 @@
       </p:sp>
       <p:sp>
         <p:nvSpPr>
-          <p:cNvPr id="164" name="Google Shape;164;p16:notes"/>
+          <p:cNvPr id="149" name="Google Shape;149;p14:notes">
+            <a:extLst>
+              <a:ext uri="{FF2B5EF4-FFF2-40B4-BE49-F238E27FC236}">
+                <a16:creationId xmlns:a16="http://schemas.microsoft.com/office/drawing/2014/main" id="{2CE8E4CC-5D4C-CDB5-1B76-FA1D8B1EABA0}"/>
+              </a:ext>
+            </a:extLst>
+          </p:cNvPr>
           <p:cNvSpPr>
             <a:spLocks noGrp="1" noRot="1" noChangeAspect="1"/>
           </p:cNvSpPr>
@@ -3313,6 +3462,11 @@
         </p:spPr>
       </p:sp>
     </p:spTree>
+    <p:extLst>
+      <p:ext uri="{BB962C8B-B14F-4D97-AF65-F5344CB8AC3E}">
+        <p14:creationId xmlns:p14="http://schemas.microsoft.com/office/powerpoint/2010/main" val="3716277290"/>
+      </p:ext>
+    </p:extLst>
   </p:cSld>
   <p:clrMapOvr>
     <a:masterClrMapping/>
@@ -3325,7 +3479,7 @@
   <p:cSld>
     <p:spTree>
       <p:nvGrpSpPr>
-        <p:cNvPr id="1" name="Shape 168"/>
+        <p:cNvPr id="1" name="Shape 154"/>
         <p:cNvGrpSpPr/>
         <p:nvPr/>
       </p:nvGrpSpPr>
@@ -3339,7 +3493,7 @@
       </p:grpSpPr>
       <p:sp>
         <p:nvSpPr>
-          <p:cNvPr id="169" name="Google Shape;169;p17:notes"/>
+          <p:cNvPr id="155" name="Google Shape;155;p15:notes"/>
           <p:cNvSpPr txBox="1">
             <a:spLocks noGrp="1"/>
           </p:cNvSpPr>
@@ -3377,7 +3531,7 @@
       </p:sp>
       <p:sp>
         <p:nvSpPr>
-          <p:cNvPr id="170" name="Google Shape;170;p17:notes"/>
+          <p:cNvPr id="156" name="Google Shape;156;p15:notes"/>
           <p:cNvSpPr>
             <a:spLocks noGrp="1" noRot="1" noChangeAspect="1"/>
           </p:cNvSpPr>
@@ -3429,7 +3583,7 @@
   <p:cSld>
     <p:spTree>
       <p:nvGrpSpPr>
-        <p:cNvPr id="1" name="Shape 175"/>
+        <p:cNvPr id="1" name="Shape 168"/>
         <p:cNvGrpSpPr/>
         <p:nvPr/>
       </p:nvGrpSpPr>
@@ -3443,7 +3597,7 @@
       </p:grpSpPr>
       <p:sp>
         <p:nvSpPr>
-          <p:cNvPr id="176" name="Google Shape;176;p18:notes"/>
+          <p:cNvPr id="169" name="Google Shape;169;p17:notes"/>
           <p:cNvSpPr txBox="1">
             <a:spLocks noGrp="1"/>
           </p:cNvSpPr>
@@ -3481,7 +3635,7 @@
       </p:sp>
       <p:sp>
         <p:nvSpPr>
-          <p:cNvPr id="177" name="Google Shape;177;p18:notes"/>
+          <p:cNvPr id="170" name="Google Shape;170;p17:notes"/>
           <p:cNvSpPr>
             <a:spLocks noGrp="1" noRot="1" noChangeAspect="1"/>
           </p:cNvSpPr>
@@ -3582,6 +3736,13 @@
             <a:schemeClr val="lt1"/>
           </a:fontRef>
         </p:style>
+        <p:txBody>
+          <a:bodyPr/>
+          <a:lstStyle/>
+          <a:p>
+            <a:endParaRPr lang="en-US"/>
+          </a:p>
+        </p:txBody>
       </p:sp>
       <p:sp>
         <p:nvSpPr>
@@ -3622,6 +3783,13 @@
             <a:schemeClr val="lt1"/>
           </a:fontRef>
         </p:style>
+        <p:txBody>
+          <a:bodyPr/>
+          <a:lstStyle/>
+          <a:p>
+            <a:endParaRPr lang="en-US"/>
+          </a:p>
+        </p:txBody>
       </p:sp>
       <p:sp>
         <p:nvSpPr>
@@ -3753,7 +3921,7 @@
             <a:fld id="{5586B75A-687E-405C-8A0B-8D00578BA2C3}" type="datetimeFigureOut">
               <a:rPr lang="en-US" smtClean="0"/>
               <a:pPr/>
-              <a:t>4/16/25</a:t>
+              <a:t>12/1/25</a:t>
             </a:fld>
             <a:endParaRPr lang="en-US" dirty="0"/>
           </a:p>
@@ -3925,7 +4093,7 @@
             <a:fld id="{5586B75A-687E-405C-8A0B-8D00578BA2C3}" type="datetimeFigureOut">
               <a:rPr lang="en-US" smtClean="0"/>
               <a:pPr/>
-              <a:t>4/16/25</a:t>
+              <a:t>12/1/25</a:t>
             </a:fld>
             <a:endParaRPr lang="en-US" dirty="0"/>
           </a:p>
@@ -4107,7 +4275,7 @@
             <a:fld id="{5586B75A-687E-405C-8A0B-8D00578BA2C3}" type="datetimeFigureOut">
               <a:rPr lang="en-US" smtClean="0"/>
               <a:pPr/>
-              <a:t>4/16/25</a:t>
+              <a:t>12/1/25</a:t>
             </a:fld>
             <a:endParaRPr lang="en-US" dirty="0"/>
           </a:p>
@@ -4279,7 +4447,7 @@
             <a:fld id="{5586B75A-687E-405C-8A0B-8D00578BA2C3}" type="datetimeFigureOut">
               <a:rPr lang="en-US" smtClean="0"/>
               <a:pPr/>
-              <a:t>4/16/25</a:t>
+              <a:t>12/1/25</a:t>
             </a:fld>
             <a:endParaRPr lang="en-US" dirty="0"/>
           </a:p>
@@ -4535,7 +4703,7 @@
             <a:fld id="{5586B75A-687E-405C-8A0B-8D00578BA2C3}" type="datetimeFigureOut">
               <a:rPr lang="en-US" smtClean="0"/>
               <a:pPr/>
-              <a:t>4/16/25</a:t>
+              <a:t>12/1/25</a:t>
             </a:fld>
             <a:endParaRPr lang="en-US" dirty="0"/>
           </a:p>
@@ -4825,7 +4993,7 @@
             <a:fld id="{5586B75A-687E-405C-8A0B-8D00578BA2C3}" type="datetimeFigureOut">
               <a:rPr lang="en-US" smtClean="0"/>
               <a:pPr/>
-              <a:t>4/16/25</a:t>
+              <a:t>12/1/25</a:t>
             </a:fld>
             <a:endParaRPr lang="en-US" dirty="0"/>
           </a:p>
@@ -5269,7 +5437,7 @@
             <a:fld id="{5586B75A-687E-405C-8A0B-8D00578BA2C3}" type="datetimeFigureOut">
               <a:rPr lang="en-US" smtClean="0"/>
               <a:pPr/>
-              <a:t>4/16/25</a:t>
+              <a:t>12/1/25</a:t>
             </a:fld>
             <a:endParaRPr lang="en-US" dirty="0"/>
           </a:p>
@@ -5389,7 +5557,7 @@
             <a:fld id="{5586B75A-687E-405C-8A0B-8D00578BA2C3}" type="datetimeFigureOut">
               <a:rPr lang="en-US" smtClean="0"/>
               <a:pPr/>
-              <a:t>4/16/25</a:t>
+              <a:t>12/1/25</a:t>
             </a:fld>
             <a:endParaRPr lang="en-US" dirty="0"/>
           </a:p>
@@ -5486,7 +5654,7 @@
             <a:fld id="{5586B75A-687E-405C-8A0B-8D00578BA2C3}" type="datetimeFigureOut">
               <a:rPr lang="en-US" smtClean="0"/>
               <a:pPr/>
-              <a:t>4/16/25</a:t>
+              <a:t>12/1/25</a:t>
             </a:fld>
             <a:endParaRPr lang="en-US" dirty="0"/>
           </a:p>
@@ -5776,7 +5944,7 @@
             <a:fld id="{5586B75A-687E-405C-8A0B-8D00578BA2C3}" type="datetimeFigureOut">
               <a:rPr lang="en-US" smtClean="0"/>
               <a:pPr/>
-              <a:t>4/16/25</a:t>
+              <a:t>12/1/25</a:t>
             </a:fld>
             <a:endParaRPr lang="en-US" dirty="0"/>
           </a:p>
@@ -6051,7 +6219,7 @@
             <a:fld id="{5586B75A-687E-405C-8A0B-8D00578BA2C3}" type="datetimeFigureOut">
               <a:rPr lang="en-US" smtClean="0"/>
               <a:pPr/>
-              <a:t>4/16/25</a:t>
+              <a:t>12/1/25</a:t>
             </a:fld>
             <a:endParaRPr lang="en-US" dirty="0"/>
           </a:p>
@@ -6177,6 +6345,13 @@
             <a:schemeClr val="lt1"/>
           </a:fontRef>
         </p:style>
+        <p:txBody>
+          <a:bodyPr/>
+          <a:lstStyle/>
+          <a:p>
+            <a:endParaRPr lang="en-US"/>
+          </a:p>
+        </p:txBody>
       </p:sp>
       <p:sp>
         <p:nvSpPr>
@@ -6250,6 +6425,13 @@
             <a:schemeClr val="lt1"/>
           </a:fontRef>
         </p:style>
+        <p:txBody>
+          <a:bodyPr/>
+          <a:lstStyle/>
+          <a:p>
+            <a:endParaRPr lang="en-US"/>
+          </a:p>
+        </p:txBody>
       </p:sp>
       <p:sp>
         <p:nvSpPr>
@@ -6350,7 +6532,7 @@
             <a:fld id="{5586B75A-687E-405C-8A0B-8D00578BA2C3}" type="datetimeFigureOut">
               <a:rPr lang="en-US" smtClean="0"/>
               <a:pPr/>
-              <a:t>4/16/25</a:t>
+              <a:t>12/1/25</a:t>
             </a:fld>
             <a:endParaRPr lang="en-US" dirty="0"/>
           </a:p>
@@ -6859,7 +7041,7 @@
           <a:p>
             <a:r>
               <a:rPr lang="en-US" dirty="0"/>
-              <a:t>Communicating with Data – Text</a:t>
+              <a:t>Communicating with Data – Text as Data</a:t>
             </a:r>
           </a:p>
         </p:txBody>
@@ -6951,6 +7133,1446 @@
 </file>
 
 <file path=ppt/slides/slide10.xml><?xml version="1.0" encoding="utf-8"?>
+<p:sld xmlns:a="http://schemas.openxmlformats.org/drawingml/2006/main" xmlns:r="http://schemas.openxmlformats.org/officeDocument/2006/relationships" xmlns:p="http://schemas.openxmlformats.org/presentationml/2006/main">
+  <p:cSld>
+    <p:spTree>
+      <p:nvGrpSpPr>
+        <p:cNvPr id="1" name="Shape 150">
+          <a:extLst>
+            <a:ext uri="{FF2B5EF4-FFF2-40B4-BE49-F238E27FC236}">
+              <a16:creationId xmlns:a16="http://schemas.microsoft.com/office/drawing/2014/main" id="{49F4FF17-BF66-33E8-0A02-3C1556771997}"/>
+            </a:ext>
+          </a:extLst>
+        </p:cNvPr>
+        <p:cNvGrpSpPr/>
+        <p:nvPr/>
+      </p:nvGrpSpPr>
+      <p:grpSpPr>
+        <a:xfrm>
+          <a:off x="0" y="0"/>
+          <a:ext cx="0" cy="0"/>
+          <a:chOff x="0" y="0"/>
+          <a:chExt cx="0" cy="0"/>
+        </a:xfrm>
+      </p:grpSpPr>
+      <p:sp>
+        <p:nvSpPr>
+          <p:cNvPr id="152" name="Google Shape;152;p21">
+            <a:extLst>
+              <a:ext uri="{FF2B5EF4-FFF2-40B4-BE49-F238E27FC236}">
+                <a16:creationId xmlns:a16="http://schemas.microsoft.com/office/drawing/2014/main" id="{71AAE164-04E6-23C7-8EFA-C4D491088365}"/>
+              </a:ext>
+            </a:extLst>
+          </p:cNvPr>
+          <p:cNvSpPr txBox="1">
+            <a:spLocks noGrp="1"/>
+          </p:cNvSpPr>
+          <p:nvPr>
+            <p:ph type="body" idx="1"/>
+          </p:nvPr>
+        </p:nvSpPr>
+        <p:spPr>
+          <a:xfrm>
+            <a:off x="3519054" y="907473"/>
+            <a:ext cx="8229600" cy="4876800"/>
+          </a:xfrm>
+          <a:prstGeom prst="rect">
+            <a:avLst/>
+          </a:prstGeom>
+          <a:noFill/>
+          <a:ln>
+            <a:noFill/>
+          </a:ln>
+        </p:spPr>
+        <p:txBody>
+          <a:bodyPr spcFirstLastPara="1" vert="horz" wrap="square" lIns="91425" tIns="45700" rIns="91425" bIns="45700" rtlCol="0" anchor="t" anchorCtr="0">
+            <a:noAutofit/>
+          </a:bodyPr>
+          <a:lstStyle/>
+          <a:p>
+            <a:pPr>
+              <a:lnSpc>
+                <a:spcPct val="100000"/>
+              </a:lnSpc>
+              <a:spcBef>
+                <a:spcPts val="0"/>
+              </a:spcBef>
+              <a:buSzPts val="2040"/>
+              <a:buFont typeface="Arial"/>
+              <a:buChar char="•"/>
+            </a:pPr>
+            <a:r>
+              <a:rPr lang="en-US" sz="2400" dirty="0">
+                <a:ea typeface="Arial"/>
+                <a:cs typeface="Arial"/>
+                <a:sym typeface="Arial"/>
+              </a:rPr>
+              <a:t>Ignore ordering relationships within the text</a:t>
+            </a:r>
+          </a:p>
+          <a:p>
+            <a:pPr>
+              <a:lnSpc>
+                <a:spcPct val="100000"/>
+              </a:lnSpc>
+              <a:spcBef>
+                <a:spcPts val="0"/>
+              </a:spcBef>
+              <a:buSzPts val="2040"/>
+              <a:buFont typeface="Arial"/>
+              <a:buChar char="•"/>
+            </a:pPr>
+            <a:r>
+              <a:rPr lang="en-US" sz="2400" dirty="0">
+                <a:cs typeface="Arial"/>
+                <a:sym typeface="Arial"/>
+              </a:rPr>
+              <a:t>Document is represented as a vector of terms and weights </a:t>
+            </a:r>
+          </a:p>
+          <a:p>
+            <a:pPr>
+              <a:lnSpc>
+                <a:spcPct val="100000"/>
+              </a:lnSpc>
+              <a:spcBef>
+                <a:spcPts val="0"/>
+              </a:spcBef>
+              <a:buSzPts val="2040"/>
+              <a:buFont typeface="Arial"/>
+              <a:buChar char="•"/>
+            </a:pPr>
+            <a:r>
+              <a:rPr lang="en-US" sz="2400" dirty="0">
+                <a:cs typeface="Arial"/>
+                <a:sym typeface="Arial"/>
+              </a:rPr>
+              <a:t>Grammar, context, and order are ignored </a:t>
+            </a:r>
+          </a:p>
+        </p:txBody>
+      </p:sp>
+      <p:sp>
+        <p:nvSpPr>
+          <p:cNvPr id="2" name="Title 1">
+            <a:extLst>
+              <a:ext uri="{FF2B5EF4-FFF2-40B4-BE49-F238E27FC236}">
+                <a16:creationId xmlns:a16="http://schemas.microsoft.com/office/drawing/2014/main" id="{529818AA-61EF-9DFC-54D3-230ABD4E021C}"/>
+              </a:ext>
+            </a:extLst>
+          </p:cNvPr>
+          <p:cNvSpPr txBox="1">
+            <a:spLocks/>
+          </p:cNvSpPr>
+          <p:nvPr/>
+        </p:nvSpPr>
+        <p:spPr>
+          <a:xfrm>
+            <a:off x="252919" y="1123837"/>
+            <a:ext cx="2947482" cy="4601183"/>
+          </a:xfrm>
+          <a:prstGeom prst="rect">
+            <a:avLst/>
+          </a:prstGeom>
+        </p:spPr>
+        <p:txBody>
+          <a:bodyPr vert="horz" lIns="91440" tIns="45720" rIns="91440" bIns="45720" rtlCol="0" anchor="ctr">
+            <a:normAutofit/>
+          </a:bodyPr>
+          <a:lstStyle>
+            <a:lvl1pPr algn="l" defTabSz="914400" rtl="0" eaLnBrk="1" latinLnBrk="0" hangingPunct="1">
+              <a:lnSpc>
+                <a:spcPct val="90000"/>
+              </a:lnSpc>
+              <a:spcBef>
+                <a:spcPct val="0"/>
+              </a:spcBef>
+              <a:buNone/>
+              <a:defRPr sz="3600" kern="1200" spc="-60" baseline="0">
+                <a:solidFill>
+                  <a:srgbClr val="FFFFFF"/>
+                </a:solidFill>
+                <a:latin typeface="+mj-lt"/>
+                <a:ea typeface="+mj-ea"/>
+                <a:cs typeface="+mj-cs"/>
+              </a:defRPr>
+            </a:lvl1pPr>
+          </a:lstStyle>
+          <a:p>
+            <a:r>
+              <a:rPr lang="en-US" dirty="0"/>
+              <a:t>“Bag of words” model</a:t>
+            </a:r>
+          </a:p>
+        </p:txBody>
+      </p:sp>
+      <p:pic>
+        <p:nvPicPr>
+          <p:cNvPr id="3" name="Picture 2">
+            <a:extLst>
+              <a:ext uri="{FF2B5EF4-FFF2-40B4-BE49-F238E27FC236}">
+                <a16:creationId xmlns:a16="http://schemas.microsoft.com/office/drawing/2014/main" id="{F85F5F26-19B0-160A-2174-C60B89CA14EA}"/>
+              </a:ext>
+            </a:extLst>
+          </p:cNvPr>
+          <p:cNvPicPr>
+            <a:picLocks noChangeAspect="1" noChangeArrowheads="1"/>
+          </p:cNvPicPr>
+          <p:nvPr/>
+        </p:nvPicPr>
+        <p:blipFill>
+          <a:blip r:embed="rId3">
+            <a:extLst>
+              <a:ext uri="{28A0092B-C50C-407E-A947-70E740481C1C}">
+                <a14:useLocalDpi xmlns:a14="http://schemas.microsoft.com/office/drawing/2010/main" val="0"/>
+              </a:ext>
+            </a:extLst>
+          </a:blip>
+          <a:srcRect/>
+          <a:stretch>
+            <a:fillRect/>
+          </a:stretch>
+        </p:blipFill>
+        <p:spPr bwMode="auto">
+          <a:xfrm>
+            <a:off x="3835729" y="2170240"/>
+            <a:ext cx="7295829" cy="4194274"/>
+          </a:xfrm>
+          <a:prstGeom prst="rect">
+            <a:avLst/>
+          </a:prstGeom>
+          <a:noFill/>
+          <a:extLst>
+            <a:ext uri="{909E8E84-426E-40DD-AFC4-6F175D3DCCD1}">
+              <a14:hiddenFill xmlns:a14="http://schemas.microsoft.com/office/drawing/2010/main">
+                <a:solidFill>
+                  <a:srgbClr val="FFFFFF"/>
+                </a:solidFill>
+              </a14:hiddenFill>
+            </a:ext>
+          </a:extLst>
+        </p:spPr>
+      </p:pic>
+      <p:sp>
+        <p:nvSpPr>
+          <p:cNvPr id="4" name="TextBox 3">
+            <a:extLst>
+              <a:ext uri="{FF2B5EF4-FFF2-40B4-BE49-F238E27FC236}">
+                <a16:creationId xmlns:a16="http://schemas.microsoft.com/office/drawing/2014/main" id="{A93C8F5F-5EE2-361F-851B-8E8E456C9C57}"/>
+              </a:ext>
+            </a:extLst>
+          </p:cNvPr>
+          <p:cNvSpPr txBox="1"/>
+          <p:nvPr/>
+        </p:nvSpPr>
+        <p:spPr>
+          <a:xfrm>
+            <a:off x="5165766" y="6488668"/>
+            <a:ext cx="7406244" cy="369332"/>
+          </a:xfrm>
+          <a:prstGeom prst="rect">
+            <a:avLst/>
+          </a:prstGeom>
+          <a:noFill/>
+        </p:spPr>
+        <p:txBody>
+          <a:bodyPr wrap="square">
+            <a:spAutoFit/>
+          </a:bodyPr>
+          <a:lstStyle/>
+          <a:p>
+            <a:r>
+              <a:rPr lang="en-US" dirty="0"/>
+              <a:t>https://</a:t>
+            </a:r>
+            <a:r>
+              <a:rPr lang="en-US" dirty="0" err="1"/>
+              <a:t>nachi-keta.medium.com</a:t>
+            </a:r>
+            <a:r>
+              <a:rPr lang="en-US" dirty="0"/>
+              <a:t>/nlp-explain-bag-of-words-3b9fc4f211e8</a:t>
+            </a:r>
+          </a:p>
+        </p:txBody>
+      </p:sp>
+    </p:spTree>
+    <p:extLst>
+      <p:ext uri="{BB962C8B-B14F-4D97-AF65-F5344CB8AC3E}">
+        <p14:creationId xmlns:p14="http://schemas.microsoft.com/office/powerpoint/2010/main" val="1940929132"/>
+      </p:ext>
+    </p:extLst>
+  </p:cSld>
+  <p:clrMapOvr>
+    <a:masterClrMapping/>
+  </p:clrMapOvr>
+</p:sld>
+</file>
+
+<file path=ppt/slides/slide11.xml><?xml version="1.0" encoding="utf-8"?>
+<p:sld xmlns:a="http://schemas.openxmlformats.org/drawingml/2006/main" xmlns:r="http://schemas.openxmlformats.org/officeDocument/2006/relationships" xmlns:p="http://schemas.openxmlformats.org/presentationml/2006/main">
+  <p:cSld>
+    <p:spTree>
+      <p:nvGrpSpPr>
+        <p:cNvPr id="1" name="Shape 150">
+          <a:extLst>
+            <a:ext uri="{FF2B5EF4-FFF2-40B4-BE49-F238E27FC236}">
+              <a16:creationId xmlns:a16="http://schemas.microsoft.com/office/drawing/2014/main" id="{D8B7BF89-9578-CD9F-7D8A-21E00D180DD0}"/>
+            </a:ext>
+          </a:extLst>
+        </p:cNvPr>
+        <p:cNvGrpSpPr/>
+        <p:nvPr/>
+      </p:nvGrpSpPr>
+      <p:grpSpPr>
+        <a:xfrm>
+          <a:off x="0" y="0"/>
+          <a:ext cx="0" cy="0"/>
+          <a:chOff x="0" y="0"/>
+          <a:chExt cx="0" cy="0"/>
+        </a:xfrm>
+      </p:grpSpPr>
+      <p:sp>
+        <p:nvSpPr>
+          <p:cNvPr id="152" name="Google Shape;152;p21">
+            <a:extLst>
+              <a:ext uri="{FF2B5EF4-FFF2-40B4-BE49-F238E27FC236}">
+                <a16:creationId xmlns:a16="http://schemas.microsoft.com/office/drawing/2014/main" id="{9E33F611-468C-2F58-34B4-05CFBB7C573B}"/>
+              </a:ext>
+            </a:extLst>
+          </p:cNvPr>
+          <p:cNvSpPr txBox="1">
+            <a:spLocks noGrp="1"/>
+          </p:cNvSpPr>
+          <p:nvPr>
+            <p:ph type="body" idx="1"/>
+          </p:nvPr>
+        </p:nvSpPr>
+        <p:spPr>
+          <a:xfrm>
+            <a:off x="3519054" y="907473"/>
+            <a:ext cx="8229600" cy="4876800"/>
+          </a:xfrm>
+          <a:prstGeom prst="rect">
+            <a:avLst/>
+          </a:prstGeom>
+          <a:noFill/>
+          <a:ln>
+            <a:noFill/>
+          </a:ln>
+        </p:spPr>
+        <p:txBody>
+          <a:bodyPr spcFirstLastPara="1" vert="horz" wrap="square" lIns="91425" tIns="45700" rIns="91425" bIns="45700" rtlCol="0" anchor="t" anchorCtr="0">
+            <a:noAutofit/>
+          </a:bodyPr>
+          <a:lstStyle/>
+          <a:p>
+            <a:pPr>
+              <a:lnSpc>
+                <a:spcPct val="100000"/>
+              </a:lnSpc>
+              <a:spcBef>
+                <a:spcPts val="0"/>
+              </a:spcBef>
+              <a:buSzPts val="2040"/>
+              <a:buFont typeface="Arial"/>
+              <a:buChar char="•"/>
+            </a:pPr>
+            <a:r>
+              <a:rPr lang="en-US" sz="2400" dirty="0">
+                <a:cs typeface="Arial"/>
+                <a:sym typeface="Arial"/>
+              </a:rPr>
+              <a:t>Comparing documents </a:t>
+            </a:r>
+            <a:r>
+              <a:rPr lang="en-US" sz="2400" dirty="0">
+                <a:cs typeface="Arial"/>
+                <a:sym typeface="Wingdings" pitchFamily="2" charset="2"/>
+              </a:rPr>
+              <a:t> comparing vectors</a:t>
+            </a:r>
+          </a:p>
+          <a:p>
+            <a:pPr>
+              <a:lnSpc>
+                <a:spcPct val="100000"/>
+              </a:lnSpc>
+              <a:spcBef>
+                <a:spcPts val="0"/>
+              </a:spcBef>
+              <a:buSzPts val="2040"/>
+              <a:buFont typeface="Arial"/>
+              <a:buChar char="•"/>
+            </a:pPr>
+            <a:r>
+              <a:rPr lang="en-US" sz="2400" dirty="0">
+                <a:cs typeface="Arial"/>
+                <a:sym typeface="Wingdings" pitchFamily="2" charset="2"/>
+              </a:rPr>
+              <a:t>Process: </a:t>
+            </a:r>
+          </a:p>
+          <a:p>
+            <a:pPr lvl="1">
+              <a:lnSpc>
+                <a:spcPct val="100000"/>
+              </a:lnSpc>
+              <a:spcBef>
+                <a:spcPts val="0"/>
+              </a:spcBef>
+              <a:buSzPts val="2040"/>
+              <a:buFont typeface="Arial"/>
+              <a:buChar char="•"/>
+            </a:pPr>
+            <a:r>
+              <a:rPr lang="en-US" sz="2200" dirty="0">
+                <a:cs typeface="Arial"/>
+                <a:sym typeface="Wingdings" pitchFamily="2" charset="2"/>
+              </a:rPr>
+              <a:t>Identify vocabulary, i.e. set of all words in all documents</a:t>
+            </a:r>
+          </a:p>
+          <a:p>
+            <a:pPr lvl="1">
+              <a:lnSpc>
+                <a:spcPct val="100000"/>
+              </a:lnSpc>
+              <a:spcBef>
+                <a:spcPts val="0"/>
+              </a:spcBef>
+              <a:buSzPts val="2040"/>
+              <a:buFont typeface="Arial"/>
+              <a:buChar char="•"/>
+            </a:pPr>
+            <a:r>
+              <a:rPr lang="en-US" sz="2200" dirty="0">
+                <a:cs typeface="Arial"/>
+                <a:sym typeface="Wingdings" pitchFamily="2" charset="2"/>
+              </a:rPr>
+              <a:t>For each document, create a vector of counts of each vocabulary word</a:t>
+            </a:r>
+          </a:p>
+          <a:p>
+            <a:pPr lvl="1">
+              <a:lnSpc>
+                <a:spcPct val="100000"/>
+              </a:lnSpc>
+              <a:spcBef>
+                <a:spcPts val="0"/>
+              </a:spcBef>
+              <a:buSzPts val="2040"/>
+              <a:buFont typeface="Arial"/>
+              <a:buChar char="•"/>
+            </a:pPr>
+            <a:r>
+              <a:rPr lang="en-US" sz="2200" dirty="0">
+                <a:cs typeface="Arial"/>
+                <a:sym typeface="Wingdings" pitchFamily="2" charset="2"/>
+              </a:rPr>
+              <a:t>Compare vectors </a:t>
+            </a:r>
+          </a:p>
+          <a:p>
+            <a:pPr>
+              <a:lnSpc>
+                <a:spcPct val="100000"/>
+              </a:lnSpc>
+              <a:spcBef>
+                <a:spcPts val="0"/>
+              </a:spcBef>
+              <a:buSzPts val="2040"/>
+              <a:buFont typeface="Arial"/>
+              <a:buChar char="•"/>
+            </a:pPr>
+            <a:r>
+              <a:rPr lang="en-US" sz="2400" dirty="0">
+                <a:cs typeface="Arial"/>
+                <a:sym typeface="Wingdings" pitchFamily="2" charset="2"/>
+              </a:rPr>
+              <a:t>Ex. </a:t>
+            </a:r>
+          </a:p>
+          <a:p>
+            <a:pPr lvl="1">
+              <a:lnSpc>
+                <a:spcPct val="100000"/>
+              </a:lnSpc>
+              <a:spcBef>
+                <a:spcPts val="0"/>
+              </a:spcBef>
+              <a:buSzPts val="2040"/>
+              <a:buFont typeface="Arial"/>
+              <a:buChar char="•"/>
+            </a:pPr>
+            <a:r>
+              <a:rPr lang="en-US" dirty="0"/>
+              <a:t>Sentence 1: “I love cats.”</a:t>
+            </a:r>
+            <a:br>
+              <a:rPr lang="en-US" sz="2400" dirty="0"/>
+            </a:br>
+            <a:r>
+              <a:rPr lang="en-US" dirty="0"/>
+              <a:t>Sentence 2: “I love dogs.”</a:t>
+            </a:r>
+          </a:p>
+          <a:p>
+            <a:pPr lvl="1">
+              <a:lnSpc>
+                <a:spcPct val="100000"/>
+              </a:lnSpc>
+              <a:spcBef>
+                <a:spcPts val="0"/>
+              </a:spcBef>
+              <a:buSzPts val="2040"/>
+              <a:buFont typeface="Arial"/>
+              <a:buChar char="•"/>
+            </a:pPr>
+            <a:endParaRPr lang="en-US" dirty="0"/>
+          </a:p>
+          <a:p>
+            <a:pPr lvl="1">
+              <a:lnSpc>
+                <a:spcPct val="100000"/>
+              </a:lnSpc>
+              <a:spcBef>
+                <a:spcPts val="0"/>
+              </a:spcBef>
+              <a:buSzPts val="2040"/>
+              <a:buFont typeface="Arial"/>
+              <a:buChar char="•"/>
+            </a:pPr>
+            <a:r>
+              <a:rPr lang="en-US" dirty="0"/>
+              <a:t>Vocabulary:</a:t>
+            </a:r>
+            <a:r>
+              <a:rPr lang="en-US" sz="2200" dirty="0"/>
+              <a:t> </a:t>
+            </a:r>
+            <a:r>
+              <a:rPr lang="en-US" dirty="0"/>
+              <a:t>[“I”, “love”, “cats”, “dogs”] </a:t>
+            </a:r>
+          </a:p>
+          <a:p>
+            <a:pPr lvl="1">
+              <a:lnSpc>
+                <a:spcPct val="100000"/>
+              </a:lnSpc>
+              <a:spcBef>
+                <a:spcPts val="0"/>
+              </a:spcBef>
+              <a:buSzPts val="2040"/>
+              <a:buFont typeface="Arial"/>
+              <a:buChar char="•"/>
+            </a:pPr>
+            <a:endParaRPr lang="en-US" dirty="0"/>
+          </a:p>
+          <a:p>
+            <a:pPr lvl="1">
+              <a:lnSpc>
+                <a:spcPct val="100000"/>
+              </a:lnSpc>
+              <a:spcBef>
+                <a:spcPts val="0"/>
+              </a:spcBef>
+              <a:buSzPts val="2040"/>
+              <a:buFont typeface="Arial"/>
+              <a:buChar char="•"/>
+            </a:pPr>
+            <a:r>
+              <a:rPr lang="en-US" dirty="0"/>
+              <a:t>Sentence 1 vector: [1, 1, 1, 0]</a:t>
+            </a:r>
+            <a:br>
+              <a:rPr lang="en-US" sz="2400" dirty="0"/>
+            </a:br>
+            <a:r>
+              <a:rPr lang="en-US" dirty="0"/>
+              <a:t>Sentence 2 vector: [1, 1, 0, 1]</a:t>
+            </a:r>
+            <a:endParaRPr sz="2200" dirty="0"/>
+          </a:p>
+        </p:txBody>
+      </p:sp>
+      <p:sp>
+        <p:nvSpPr>
+          <p:cNvPr id="2" name="Title 1">
+            <a:extLst>
+              <a:ext uri="{FF2B5EF4-FFF2-40B4-BE49-F238E27FC236}">
+                <a16:creationId xmlns:a16="http://schemas.microsoft.com/office/drawing/2014/main" id="{05782544-C83A-D6D8-11F0-92D0C027CCAB}"/>
+              </a:ext>
+            </a:extLst>
+          </p:cNvPr>
+          <p:cNvSpPr txBox="1">
+            <a:spLocks/>
+          </p:cNvSpPr>
+          <p:nvPr/>
+        </p:nvSpPr>
+        <p:spPr>
+          <a:xfrm>
+            <a:off x="252919" y="1123837"/>
+            <a:ext cx="2947482" cy="4601183"/>
+          </a:xfrm>
+          <a:prstGeom prst="rect">
+            <a:avLst/>
+          </a:prstGeom>
+        </p:spPr>
+        <p:txBody>
+          <a:bodyPr vert="horz" lIns="91440" tIns="45720" rIns="91440" bIns="45720" rtlCol="0" anchor="ctr">
+            <a:normAutofit/>
+          </a:bodyPr>
+          <a:lstStyle>
+            <a:lvl1pPr algn="l" defTabSz="914400" rtl="0" eaLnBrk="1" latinLnBrk="0" hangingPunct="1">
+              <a:lnSpc>
+                <a:spcPct val="90000"/>
+              </a:lnSpc>
+              <a:spcBef>
+                <a:spcPct val="0"/>
+              </a:spcBef>
+              <a:buNone/>
+              <a:defRPr sz="3600" kern="1200" spc="-60" baseline="0">
+                <a:solidFill>
+                  <a:srgbClr val="FFFFFF"/>
+                </a:solidFill>
+                <a:latin typeface="+mj-lt"/>
+                <a:ea typeface="+mj-ea"/>
+                <a:cs typeface="+mj-cs"/>
+              </a:defRPr>
+            </a:lvl1pPr>
+          </a:lstStyle>
+          <a:p>
+            <a:r>
+              <a:rPr lang="en-US" dirty="0"/>
+              <a:t>“Bag of words” model</a:t>
+            </a:r>
+          </a:p>
+        </p:txBody>
+      </p:sp>
+      <p:sp>
+        <p:nvSpPr>
+          <p:cNvPr id="7" name="TextBox 6">
+            <a:extLst>
+              <a:ext uri="{FF2B5EF4-FFF2-40B4-BE49-F238E27FC236}">
+                <a16:creationId xmlns:a16="http://schemas.microsoft.com/office/drawing/2014/main" id="{B83B3421-0E65-DCA0-6FA5-E1AA6E2B1DA6}"/>
+              </a:ext>
+            </a:extLst>
+          </p:cNvPr>
+          <p:cNvSpPr txBox="1"/>
+          <p:nvPr/>
+        </p:nvSpPr>
+        <p:spPr>
+          <a:xfrm>
+            <a:off x="5165766" y="6488668"/>
+            <a:ext cx="7406244" cy="369332"/>
+          </a:xfrm>
+          <a:prstGeom prst="rect">
+            <a:avLst/>
+          </a:prstGeom>
+          <a:noFill/>
+        </p:spPr>
+        <p:txBody>
+          <a:bodyPr wrap="square">
+            <a:spAutoFit/>
+          </a:bodyPr>
+          <a:lstStyle/>
+          <a:p>
+            <a:r>
+              <a:rPr lang="en-US" dirty="0"/>
+              <a:t>https://</a:t>
+            </a:r>
+            <a:r>
+              <a:rPr lang="en-US" dirty="0" err="1"/>
+              <a:t>nachi-keta.medium.com</a:t>
+            </a:r>
+            <a:r>
+              <a:rPr lang="en-US" dirty="0"/>
+              <a:t>/nlp-explain-bag-of-words-3b9fc4f211e8</a:t>
+            </a:r>
+          </a:p>
+        </p:txBody>
+      </p:sp>
+    </p:spTree>
+    <p:extLst>
+      <p:ext uri="{BB962C8B-B14F-4D97-AF65-F5344CB8AC3E}">
+        <p14:creationId xmlns:p14="http://schemas.microsoft.com/office/powerpoint/2010/main" val="1476962176"/>
+      </p:ext>
+    </p:extLst>
+  </p:cSld>
+  <p:clrMapOvr>
+    <a:masterClrMapping/>
+  </p:clrMapOvr>
+</p:sld>
+</file>
+
+<file path=ppt/slides/slide12.xml><?xml version="1.0" encoding="utf-8"?>
+<p:sld xmlns:a="http://schemas.openxmlformats.org/drawingml/2006/main" xmlns:r="http://schemas.openxmlformats.org/officeDocument/2006/relationships" xmlns:p="http://schemas.openxmlformats.org/presentationml/2006/main">
+  <p:cSld>
+    <p:spTree>
+      <p:nvGrpSpPr>
+        <p:cNvPr id="1" name="Shape 150">
+          <a:extLst>
+            <a:ext uri="{FF2B5EF4-FFF2-40B4-BE49-F238E27FC236}">
+              <a16:creationId xmlns:a16="http://schemas.microsoft.com/office/drawing/2014/main" id="{C35B65BA-71A9-78C4-F704-91A2B69605CA}"/>
+            </a:ext>
+          </a:extLst>
+        </p:cNvPr>
+        <p:cNvGrpSpPr/>
+        <p:nvPr/>
+      </p:nvGrpSpPr>
+      <p:grpSpPr>
+        <a:xfrm>
+          <a:off x="0" y="0"/>
+          <a:ext cx="0" cy="0"/>
+          <a:chOff x="0" y="0"/>
+          <a:chExt cx="0" cy="0"/>
+        </a:xfrm>
+      </p:grpSpPr>
+      <p:sp>
+        <p:nvSpPr>
+          <p:cNvPr id="152" name="Google Shape;152;p21">
+            <a:extLst>
+              <a:ext uri="{FF2B5EF4-FFF2-40B4-BE49-F238E27FC236}">
+                <a16:creationId xmlns:a16="http://schemas.microsoft.com/office/drawing/2014/main" id="{17EE3AF2-D886-EFD4-95BC-523938D6D403}"/>
+              </a:ext>
+            </a:extLst>
+          </p:cNvPr>
+          <p:cNvSpPr txBox="1">
+            <a:spLocks noGrp="1"/>
+          </p:cNvSpPr>
+          <p:nvPr>
+            <p:ph type="body" idx="1"/>
+          </p:nvPr>
+        </p:nvSpPr>
+        <p:spPr>
+          <a:xfrm>
+            <a:off x="3519054" y="907473"/>
+            <a:ext cx="8229600" cy="4876800"/>
+          </a:xfrm>
+          <a:prstGeom prst="rect">
+            <a:avLst/>
+          </a:prstGeom>
+          <a:noFill/>
+          <a:ln>
+            <a:noFill/>
+          </a:ln>
+        </p:spPr>
+        <p:txBody>
+          <a:bodyPr spcFirstLastPara="1" vert="horz" wrap="square" lIns="91425" tIns="45700" rIns="91425" bIns="45700" rtlCol="0" anchor="t" anchorCtr="0">
+            <a:noAutofit/>
+          </a:bodyPr>
+          <a:lstStyle/>
+          <a:p>
+            <a:pPr>
+              <a:lnSpc>
+                <a:spcPct val="100000"/>
+              </a:lnSpc>
+              <a:spcBef>
+                <a:spcPts val="0"/>
+              </a:spcBef>
+              <a:buSzPts val="2040"/>
+              <a:buFont typeface="Arial"/>
+              <a:buChar char="•"/>
+            </a:pPr>
+            <a:r>
+              <a:rPr lang="en-US" sz="2400" dirty="0">
+                <a:cs typeface="Arial"/>
+                <a:sym typeface="Arial"/>
+              </a:rPr>
+              <a:t>Comparing documents </a:t>
+            </a:r>
+            <a:r>
+              <a:rPr lang="en-US" sz="2400" dirty="0">
+                <a:cs typeface="Arial"/>
+                <a:sym typeface="Wingdings" pitchFamily="2" charset="2"/>
+              </a:rPr>
+              <a:t> comparing vectors</a:t>
+            </a:r>
+          </a:p>
+          <a:p>
+            <a:pPr>
+              <a:lnSpc>
+                <a:spcPct val="100000"/>
+              </a:lnSpc>
+              <a:spcBef>
+                <a:spcPts val="0"/>
+              </a:spcBef>
+              <a:buSzPts val="2040"/>
+              <a:buFont typeface="Arial"/>
+              <a:buChar char="•"/>
+            </a:pPr>
+            <a:r>
+              <a:rPr lang="en-US" sz="2400" dirty="0">
+                <a:cs typeface="Arial"/>
+                <a:sym typeface="Wingdings" pitchFamily="2" charset="2"/>
+              </a:rPr>
+              <a:t>Process: </a:t>
+            </a:r>
+          </a:p>
+          <a:p>
+            <a:pPr lvl="1">
+              <a:lnSpc>
+                <a:spcPct val="100000"/>
+              </a:lnSpc>
+              <a:spcBef>
+                <a:spcPts val="0"/>
+              </a:spcBef>
+              <a:buSzPts val="2040"/>
+              <a:buFont typeface="Arial"/>
+              <a:buChar char="•"/>
+            </a:pPr>
+            <a:r>
+              <a:rPr lang="en-US" sz="2200" dirty="0">
+                <a:cs typeface="Arial"/>
+                <a:sym typeface="Wingdings" pitchFamily="2" charset="2"/>
+              </a:rPr>
+              <a:t>Identify vocabulary, i.e. set of all words in all documents</a:t>
+            </a:r>
+          </a:p>
+          <a:p>
+            <a:pPr lvl="1">
+              <a:lnSpc>
+                <a:spcPct val="100000"/>
+              </a:lnSpc>
+              <a:spcBef>
+                <a:spcPts val="0"/>
+              </a:spcBef>
+              <a:buSzPts val="2040"/>
+              <a:buFont typeface="Arial"/>
+              <a:buChar char="•"/>
+            </a:pPr>
+            <a:r>
+              <a:rPr lang="en-US" sz="2200" dirty="0">
+                <a:cs typeface="Arial"/>
+                <a:sym typeface="Wingdings" pitchFamily="2" charset="2"/>
+              </a:rPr>
+              <a:t>For each document, create a vector of counts of each vocabulary word</a:t>
+            </a:r>
+          </a:p>
+          <a:p>
+            <a:pPr lvl="1">
+              <a:lnSpc>
+                <a:spcPct val="100000"/>
+              </a:lnSpc>
+              <a:spcBef>
+                <a:spcPts val="0"/>
+              </a:spcBef>
+              <a:buSzPts val="2040"/>
+              <a:buFont typeface="Arial"/>
+              <a:buChar char="•"/>
+            </a:pPr>
+            <a:r>
+              <a:rPr lang="en-US" sz="2200" dirty="0">
+                <a:cs typeface="Arial"/>
+                <a:sym typeface="Wingdings" pitchFamily="2" charset="2"/>
+              </a:rPr>
+              <a:t>Compare vectors </a:t>
+            </a:r>
+          </a:p>
+          <a:p>
+            <a:pPr>
+              <a:lnSpc>
+                <a:spcPct val="100000"/>
+              </a:lnSpc>
+              <a:spcBef>
+                <a:spcPts val="0"/>
+              </a:spcBef>
+              <a:buSzPts val="2040"/>
+              <a:buFont typeface="Arial"/>
+              <a:buChar char="•"/>
+            </a:pPr>
+            <a:r>
+              <a:rPr lang="en-US" sz="2400" dirty="0">
+                <a:cs typeface="Arial"/>
+                <a:sym typeface="Wingdings" pitchFamily="2" charset="2"/>
+              </a:rPr>
+              <a:t>Ex. </a:t>
+            </a:r>
+          </a:p>
+          <a:p>
+            <a:pPr lvl="1">
+              <a:lnSpc>
+                <a:spcPct val="100000"/>
+              </a:lnSpc>
+              <a:spcBef>
+                <a:spcPts val="0"/>
+              </a:spcBef>
+              <a:buSzPts val="2040"/>
+              <a:buFont typeface="Arial"/>
+              <a:buChar char="•"/>
+            </a:pPr>
+            <a:r>
+              <a:rPr lang="en-US" dirty="0"/>
+              <a:t>Sentence 1: “I love cats.”</a:t>
+            </a:r>
+            <a:endParaRPr lang="en-US" sz="2400" dirty="0"/>
+          </a:p>
+          <a:p>
+            <a:pPr lvl="1">
+              <a:lnSpc>
+                <a:spcPct val="100000"/>
+              </a:lnSpc>
+              <a:spcBef>
+                <a:spcPts val="0"/>
+              </a:spcBef>
+              <a:buSzPts val="2040"/>
+              <a:buFont typeface="Arial"/>
+              <a:buChar char="•"/>
+            </a:pPr>
+            <a:r>
+              <a:rPr lang="en-US" dirty="0"/>
+              <a:t>Sentence 2: “I love dogs.”</a:t>
+            </a:r>
+          </a:p>
+          <a:p>
+            <a:pPr lvl="1">
+              <a:lnSpc>
+                <a:spcPct val="100000"/>
+              </a:lnSpc>
+              <a:spcBef>
+                <a:spcPts val="0"/>
+              </a:spcBef>
+              <a:buSzPts val="2040"/>
+              <a:buFont typeface="Arial"/>
+              <a:buChar char="•"/>
+            </a:pPr>
+            <a:r>
+              <a:rPr lang="en-US" dirty="0">
+                <a:solidFill>
+                  <a:srgbClr val="C00000"/>
+                </a:solidFill>
+              </a:rPr>
+              <a:t>Sentence 3: “I love cats and dogs.”</a:t>
+            </a:r>
+          </a:p>
+          <a:p>
+            <a:pPr lvl="1">
+              <a:lnSpc>
+                <a:spcPct val="100000"/>
+              </a:lnSpc>
+              <a:spcBef>
+                <a:spcPts val="0"/>
+              </a:spcBef>
+              <a:buSzPts val="2040"/>
+              <a:buFont typeface="Arial"/>
+              <a:buChar char="•"/>
+            </a:pPr>
+            <a:endParaRPr lang="en-US" dirty="0"/>
+          </a:p>
+          <a:p>
+            <a:pPr lvl="1">
+              <a:lnSpc>
+                <a:spcPct val="100000"/>
+              </a:lnSpc>
+              <a:spcBef>
+                <a:spcPts val="0"/>
+              </a:spcBef>
+              <a:buSzPts val="2040"/>
+              <a:buFont typeface="Arial"/>
+              <a:buChar char="•"/>
+            </a:pPr>
+            <a:r>
+              <a:rPr lang="en-US" dirty="0"/>
+              <a:t>Vocabulary:</a:t>
+            </a:r>
+            <a:r>
+              <a:rPr lang="en-US" sz="2200" dirty="0"/>
+              <a:t> </a:t>
+            </a:r>
+            <a:r>
+              <a:rPr lang="en-US" dirty="0"/>
+              <a:t>[“I”, “love”, “cats”, “dogs”, </a:t>
+            </a:r>
+            <a:r>
+              <a:rPr lang="en-US" dirty="0">
+                <a:solidFill>
+                  <a:srgbClr val="C00000"/>
+                </a:solidFill>
+              </a:rPr>
+              <a:t>”and”</a:t>
+            </a:r>
+            <a:r>
+              <a:rPr lang="en-US" dirty="0"/>
+              <a:t>] </a:t>
+            </a:r>
+          </a:p>
+          <a:p>
+            <a:pPr lvl="1">
+              <a:lnSpc>
+                <a:spcPct val="100000"/>
+              </a:lnSpc>
+              <a:spcBef>
+                <a:spcPts val="0"/>
+              </a:spcBef>
+              <a:buSzPts val="2040"/>
+              <a:buFont typeface="Arial"/>
+              <a:buChar char="•"/>
+            </a:pPr>
+            <a:endParaRPr lang="en-US" dirty="0"/>
+          </a:p>
+          <a:p>
+            <a:pPr lvl="1">
+              <a:lnSpc>
+                <a:spcPct val="100000"/>
+              </a:lnSpc>
+              <a:spcBef>
+                <a:spcPts val="0"/>
+              </a:spcBef>
+              <a:buSzPts val="2040"/>
+              <a:buFont typeface="Arial"/>
+              <a:buChar char="•"/>
+            </a:pPr>
+            <a:r>
+              <a:rPr lang="en-US" dirty="0"/>
+              <a:t>Sentence 1 vector: [1, 1, 1, 0, </a:t>
+            </a:r>
+            <a:r>
+              <a:rPr lang="en-US" dirty="0">
+                <a:solidFill>
+                  <a:srgbClr val="C00000"/>
+                </a:solidFill>
+              </a:rPr>
+              <a:t>0</a:t>
+            </a:r>
+            <a:r>
+              <a:rPr lang="en-US" dirty="0"/>
+              <a:t>]</a:t>
+            </a:r>
+            <a:endParaRPr lang="en-US" sz="2400" dirty="0"/>
+          </a:p>
+          <a:p>
+            <a:pPr lvl="1">
+              <a:lnSpc>
+                <a:spcPct val="100000"/>
+              </a:lnSpc>
+              <a:spcBef>
+                <a:spcPts val="0"/>
+              </a:spcBef>
+              <a:buSzPts val="2040"/>
+              <a:buFont typeface="Arial"/>
+              <a:buChar char="•"/>
+            </a:pPr>
+            <a:r>
+              <a:rPr lang="en-US" dirty="0"/>
+              <a:t>Sentence 2 vector: [1, 1, 0, 1, </a:t>
+            </a:r>
+            <a:r>
+              <a:rPr lang="en-US" dirty="0">
+                <a:solidFill>
+                  <a:srgbClr val="C00000"/>
+                </a:solidFill>
+              </a:rPr>
+              <a:t>0</a:t>
+            </a:r>
+            <a:r>
+              <a:rPr lang="en-US" dirty="0"/>
+              <a:t>]</a:t>
+            </a:r>
+            <a:endParaRPr lang="en-US" sz="2200" dirty="0"/>
+          </a:p>
+          <a:p>
+            <a:pPr lvl="1">
+              <a:lnSpc>
+                <a:spcPct val="100000"/>
+              </a:lnSpc>
+              <a:spcBef>
+                <a:spcPts val="0"/>
+              </a:spcBef>
+              <a:buSzPts val="2040"/>
+              <a:buFont typeface="Arial"/>
+              <a:buChar char="•"/>
+            </a:pPr>
+            <a:r>
+              <a:rPr lang="en-US" dirty="0">
+                <a:solidFill>
+                  <a:srgbClr val="C00000"/>
+                </a:solidFill>
+              </a:rPr>
+              <a:t>Sentence 3 vector: [1, 1, 1, 1, 1]</a:t>
+            </a:r>
+          </a:p>
+        </p:txBody>
+      </p:sp>
+      <p:sp>
+        <p:nvSpPr>
+          <p:cNvPr id="2" name="Title 1">
+            <a:extLst>
+              <a:ext uri="{FF2B5EF4-FFF2-40B4-BE49-F238E27FC236}">
+                <a16:creationId xmlns:a16="http://schemas.microsoft.com/office/drawing/2014/main" id="{5AD5AA69-53CE-A1C1-0E30-20E011A907DC}"/>
+              </a:ext>
+            </a:extLst>
+          </p:cNvPr>
+          <p:cNvSpPr txBox="1">
+            <a:spLocks/>
+          </p:cNvSpPr>
+          <p:nvPr/>
+        </p:nvSpPr>
+        <p:spPr>
+          <a:xfrm>
+            <a:off x="252919" y="1123837"/>
+            <a:ext cx="2947482" cy="4601183"/>
+          </a:xfrm>
+          <a:prstGeom prst="rect">
+            <a:avLst/>
+          </a:prstGeom>
+        </p:spPr>
+        <p:txBody>
+          <a:bodyPr vert="horz" lIns="91440" tIns="45720" rIns="91440" bIns="45720" rtlCol="0" anchor="ctr">
+            <a:normAutofit/>
+          </a:bodyPr>
+          <a:lstStyle>
+            <a:lvl1pPr algn="l" defTabSz="914400" rtl="0" eaLnBrk="1" latinLnBrk="0" hangingPunct="1">
+              <a:lnSpc>
+                <a:spcPct val="90000"/>
+              </a:lnSpc>
+              <a:spcBef>
+                <a:spcPct val="0"/>
+              </a:spcBef>
+              <a:buNone/>
+              <a:defRPr sz="3600" kern="1200" spc="-60" baseline="0">
+                <a:solidFill>
+                  <a:srgbClr val="FFFFFF"/>
+                </a:solidFill>
+                <a:latin typeface="+mj-lt"/>
+                <a:ea typeface="+mj-ea"/>
+                <a:cs typeface="+mj-cs"/>
+              </a:defRPr>
+            </a:lvl1pPr>
+          </a:lstStyle>
+          <a:p>
+            <a:r>
+              <a:rPr lang="en-US" dirty="0"/>
+              <a:t>“Bag of words” model</a:t>
+            </a:r>
+          </a:p>
+        </p:txBody>
+      </p:sp>
+    </p:spTree>
+    <p:extLst>
+      <p:ext uri="{BB962C8B-B14F-4D97-AF65-F5344CB8AC3E}">
+        <p14:creationId xmlns:p14="http://schemas.microsoft.com/office/powerpoint/2010/main" val="3252230936"/>
+      </p:ext>
+    </p:extLst>
+  </p:cSld>
+  <p:clrMapOvr>
+    <a:masterClrMapping/>
+  </p:clrMapOvr>
+</p:sld>
+</file>
+
+<file path=ppt/slides/slide13.xml><?xml version="1.0" encoding="utf-8"?>
+<p:sld xmlns:a="http://schemas.openxmlformats.org/drawingml/2006/main" xmlns:r="http://schemas.openxmlformats.org/officeDocument/2006/relationships" xmlns:p="http://schemas.openxmlformats.org/presentationml/2006/main">
+  <p:cSld>
+    <p:spTree>
+      <p:nvGrpSpPr>
+        <p:cNvPr id="1" name="Shape 157"/>
+        <p:cNvGrpSpPr/>
+        <p:nvPr/>
+      </p:nvGrpSpPr>
+      <p:grpSpPr>
+        <a:xfrm>
+          <a:off x="0" y="0"/>
+          <a:ext cx="0" cy="0"/>
+          <a:chOff x="0" y="0"/>
+          <a:chExt cx="0" cy="0"/>
+        </a:xfrm>
+      </p:grpSpPr>
+      <p:sp>
+        <p:nvSpPr>
+          <p:cNvPr id="159" name="Google Shape;159;p22"/>
+          <p:cNvSpPr txBox="1">
+            <a:spLocks noGrp="1"/>
+          </p:cNvSpPr>
+          <p:nvPr>
+            <p:ph type="body" idx="1"/>
+          </p:nvPr>
+        </p:nvSpPr>
+        <p:spPr>
+          <a:xfrm>
+            <a:off x="3463636" y="1069848"/>
+            <a:ext cx="4038600" cy="4718304"/>
+          </a:xfrm>
+          <a:prstGeom prst="rect">
+            <a:avLst/>
+          </a:prstGeom>
+          <a:noFill/>
+          <a:ln>
+            <a:noFill/>
+          </a:ln>
+        </p:spPr>
+        <p:txBody>
+          <a:bodyPr spcFirstLastPara="1" vert="horz" wrap="square" lIns="91425" tIns="45700" rIns="91425" bIns="45700" rtlCol="0" anchor="t" anchorCtr="0">
+            <a:noAutofit/>
+          </a:bodyPr>
+          <a:lstStyle/>
+          <a:p>
+            <a:pPr>
+              <a:lnSpc>
+                <a:spcPct val="100000"/>
+              </a:lnSpc>
+              <a:spcBef>
+                <a:spcPts val="0"/>
+              </a:spcBef>
+              <a:buSzPts val="1700"/>
+              <a:buFont typeface="Arial"/>
+              <a:buChar char="•"/>
+            </a:pPr>
+            <a:r>
+              <a:rPr lang="en-US" sz="2400" dirty="0">
+                <a:ea typeface="Arial"/>
+                <a:cs typeface="Arial"/>
+                <a:sym typeface="Arial"/>
+              </a:rPr>
+              <a:t>Recent history</a:t>
+            </a:r>
+            <a:endParaRPr sz="2400" dirty="0"/>
+          </a:p>
+          <a:p>
+            <a:pPr marL="457200" lvl="1" indent="-190500">
+              <a:lnSpc>
+                <a:spcPct val="100000"/>
+              </a:lnSpc>
+              <a:spcBef>
+                <a:spcPts val="1200"/>
+              </a:spcBef>
+              <a:spcAft>
+                <a:spcPts val="0"/>
+              </a:spcAft>
+              <a:buSzPts val="1530"/>
+              <a:buFont typeface="Merriweather Sans"/>
+              <a:buChar char="-"/>
+            </a:pPr>
+            <a:r>
+              <a:rPr lang="en-US" sz="2400" dirty="0">
+                <a:ea typeface="Arial"/>
+                <a:cs typeface="Arial"/>
+                <a:sym typeface="Arial"/>
+              </a:rPr>
+              <a:t>Initiatives by President Clinton</a:t>
+            </a:r>
+            <a:endParaRPr sz="2400" dirty="0"/>
+          </a:p>
+          <a:p>
+            <a:pPr marL="457200" lvl="1" indent="-190500">
+              <a:lnSpc>
+                <a:spcPct val="100000"/>
+              </a:lnSpc>
+              <a:spcBef>
+                <a:spcPts val="1200"/>
+              </a:spcBef>
+              <a:spcAft>
+                <a:spcPts val="0"/>
+              </a:spcAft>
+              <a:buSzPts val="1530"/>
+              <a:buFont typeface="Merriweather Sans"/>
+              <a:buChar char="-"/>
+            </a:pPr>
+            <a:r>
+              <a:rPr lang="en-US" sz="2400" dirty="0">
+                <a:ea typeface="Arial"/>
+                <a:cs typeface="Arial"/>
+                <a:sym typeface="Arial"/>
+              </a:rPr>
+              <a:t>Overhaul by President Obama</a:t>
+            </a:r>
+            <a:endParaRPr sz="2400" dirty="0"/>
+          </a:p>
+          <a:p>
+            <a:pPr>
+              <a:lnSpc>
+                <a:spcPct val="100000"/>
+              </a:lnSpc>
+              <a:buSzPts val="1700"/>
+              <a:buFont typeface="Arial"/>
+              <a:buChar char="•"/>
+            </a:pPr>
+            <a:r>
+              <a:rPr lang="en-US" sz="2400" dirty="0">
+                <a:ea typeface="Arial"/>
+                <a:cs typeface="Arial"/>
+                <a:sym typeface="Arial"/>
+              </a:rPr>
+              <a:t>Text data</a:t>
+            </a:r>
+            <a:endParaRPr sz="2400" dirty="0"/>
+          </a:p>
+          <a:p>
+            <a:pPr marL="457200" lvl="1" indent="-190500">
+              <a:lnSpc>
+                <a:spcPct val="100000"/>
+              </a:lnSpc>
+              <a:spcBef>
+                <a:spcPts val="1200"/>
+              </a:spcBef>
+              <a:spcAft>
+                <a:spcPts val="0"/>
+              </a:spcAft>
+              <a:buSzPts val="1530"/>
+              <a:buFont typeface="Merriweather Sans"/>
+              <a:buChar char="-"/>
+            </a:pPr>
+            <a:r>
+              <a:rPr lang="en-US" sz="2400" dirty="0">
+                <a:ea typeface="Arial"/>
+                <a:cs typeface="Arial"/>
+                <a:sym typeface="Arial"/>
+              </a:rPr>
+              <a:t>News articles</a:t>
+            </a:r>
+            <a:endParaRPr sz="2400" dirty="0"/>
+          </a:p>
+          <a:p>
+            <a:pPr marL="457200" lvl="1" indent="-190500">
+              <a:lnSpc>
+                <a:spcPct val="100000"/>
+              </a:lnSpc>
+              <a:spcBef>
+                <a:spcPts val="1200"/>
+              </a:spcBef>
+              <a:spcAft>
+                <a:spcPts val="0"/>
+              </a:spcAft>
+              <a:buSzPts val="1530"/>
+              <a:buFont typeface="Merriweather Sans"/>
+              <a:buChar char="-"/>
+            </a:pPr>
+            <a:r>
+              <a:rPr lang="en-US" sz="2400" dirty="0">
+                <a:ea typeface="Arial"/>
+                <a:cs typeface="Arial"/>
+                <a:sym typeface="Arial"/>
+              </a:rPr>
+              <a:t>Speech transcriptions</a:t>
+            </a:r>
+            <a:endParaRPr sz="2400" dirty="0"/>
+          </a:p>
+          <a:p>
+            <a:pPr marL="457200" lvl="1" indent="-190500">
+              <a:lnSpc>
+                <a:spcPct val="100000"/>
+              </a:lnSpc>
+              <a:spcBef>
+                <a:spcPts val="1200"/>
+              </a:spcBef>
+              <a:spcAft>
+                <a:spcPts val="0"/>
+              </a:spcAft>
+              <a:buSzPts val="1530"/>
+              <a:buFont typeface="Merriweather Sans"/>
+              <a:buChar char="-"/>
+            </a:pPr>
+            <a:r>
+              <a:rPr lang="en-US" sz="2400" dirty="0">
+                <a:ea typeface="Arial"/>
+                <a:cs typeface="Arial"/>
+                <a:sym typeface="Arial"/>
+              </a:rPr>
+              <a:t>Legal documents</a:t>
+            </a:r>
+            <a:endParaRPr sz="2400" dirty="0">
+              <a:ea typeface="Arial"/>
+              <a:cs typeface="Arial"/>
+              <a:sym typeface="Arial"/>
+            </a:endParaRPr>
+          </a:p>
+        </p:txBody>
+      </p:sp>
+      <p:pic>
+        <p:nvPicPr>
+          <p:cNvPr id="160" name="Google Shape;160;p22"/>
+          <p:cNvPicPr preferRelativeResize="0">
+            <a:picLocks noGrp="1"/>
+          </p:cNvPicPr>
+          <p:nvPr>
+            <p:ph type="body" idx="2"/>
+          </p:nvPr>
+        </p:nvPicPr>
+        <p:blipFill rotWithShape="1">
+          <a:blip r:embed="rId3">
+            <a:alphaModFix/>
+          </a:blip>
+          <a:srcRect t="1062" b="434"/>
+          <a:stretch/>
+        </p:blipFill>
+        <p:spPr>
+          <a:xfrm>
+            <a:off x="7654636" y="1069848"/>
+            <a:ext cx="4038600" cy="2983602"/>
+          </a:xfrm>
+          <a:prstGeom prst="rect">
+            <a:avLst/>
+          </a:prstGeom>
+          <a:noFill/>
+          <a:ln>
+            <a:noFill/>
+          </a:ln>
+        </p:spPr>
+      </p:pic>
+      <p:sp>
+        <p:nvSpPr>
+          <p:cNvPr id="2" name="Title 1">
+            <a:extLst>
+              <a:ext uri="{FF2B5EF4-FFF2-40B4-BE49-F238E27FC236}">
+                <a16:creationId xmlns:a16="http://schemas.microsoft.com/office/drawing/2014/main" id="{DD00AB82-BAAD-2456-5B26-1A25B3AB7D58}"/>
+              </a:ext>
+            </a:extLst>
+          </p:cNvPr>
+          <p:cNvSpPr txBox="1">
+            <a:spLocks/>
+          </p:cNvSpPr>
+          <p:nvPr/>
+        </p:nvSpPr>
+        <p:spPr>
+          <a:xfrm>
+            <a:off x="252919" y="1123837"/>
+            <a:ext cx="2947482" cy="4601183"/>
+          </a:xfrm>
+          <a:prstGeom prst="rect">
+            <a:avLst/>
+          </a:prstGeom>
+        </p:spPr>
+        <p:txBody>
+          <a:bodyPr vert="horz" lIns="91440" tIns="45720" rIns="91440" bIns="45720" rtlCol="0" anchor="ctr">
+            <a:normAutofit/>
+          </a:bodyPr>
+          <a:lstStyle>
+            <a:lvl1pPr algn="l" defTabSz="914400" rtl="0" eaLnBrk="1" latinLnBrk="0" hangingPunct="1">
+              <a:lnSpc>
+                <a:spcPct val="90000"/>
+              </a:lnSpc>
+              <a:spcBef>
+                <a:spcPct val="0"/>
+              </a:spcBef>
+              <a:buNone/>
+              <a:defRPr sz="3600" kern="1200" spc="-60" baseline="0">
+                <a:solidFill>
+                  <a:srgbClr val="FFFFFF"/>
+                </a:solidFill>
+                <a:latin typeface="+mj-lt"/>
+                <a:ea typeface="+mj-ea"/>
+                <a:cs typeface="+mj-cs"/>
+              </a:defRPr>
+            </a:lvl1pPr>
+          </a:lstStyle>
+          <a:p>
+            <a:r>
+              <a:rPr lang="en-US" dirty="0"/>
+              <a:t>Example: health care reform</a:t>
+            </a:r>
+          </a:p>
+        </p:txBody>
+      </p:sp>
+    </p:spTree>
+  </p:cSld>
+  <p:clrMapOvr>
+    <a:masterClrMapping/>
+  </p:clrMapOvr>
+</p:sld>
+</file>
+
+<file path=ppt/slides/slide14.xml><?xml version="1.0" encoding="utf-8"?>
 <p:sld xmlns:a="http://schemas.openxmlformats.org/drawingml/2006/main" xmlns:r="http://schemas.openxmlformats.org/officeDocument/2006/relationships" xmlns:p="http://schemas.openxmlformats.org/presentationml/2006/main">
   <p:cSld>
     <p:spTree>
@@ -7102,7 +8724,7 @@
 </p:sld>
 </file>
 
-<file path=ppt/slides/slide11.xml><?xml version="1.0" encoding="utf-8"?>
+<file path=ppt/slides/slide15.xml><?xml version="1.0" encoding="utf-8"?>
 <p:sld xmlns:a="http://schemas.openxmlformats.org/drawingml/2006/main" xmlns:r="http://schemas.openxmlformats.org/officeDocument/2006/relationships" xmlns:p="http://schemas.openxmlformats.org/presentationml/2006/main">
   <p:cSld>
     <p:spTree>
@@ -7254,7 +8876,7 @@
 </p:sld>
 </file>
 
-<file path=ppt/slides/slide12.xml><?xml version="1.0" encoding="utf-8"?>
+<file path=ppt/slides/slide16.xml><?xml version="1.0" encoding="utf-8"?>
 <p:sld xmlns:a="http://schemas.openxmlformats.org/drawingml/2006/main" xmlns:r="http://schemas.openxmlformats.org/officeDocument/2006/relationships" xmlns:p="http://schemas.openxmlformats.org/presentationml/2006/main">
   <p:cSld>
     <p:spTree>
@@ -7713,7 +9335,7 @@
 </p:sld>
 </file>
 
-<file path=ppt/slides/slide13.xml><?xml version="1.0" encoding="utf-8"?>
+<file path=ppt/slides/slide17.xml><?xml version="1.0" encoding="utf-8"?>
 <p:sld xmlns:a="http://schemas.openxmlformats.org/drawingml/2006/main" xmlns:r="http://schemas.openxmlformats.org/officeDocument/2006/relationships" xmlns:p="http://schemas.openxmlformats.org/presentationml/2006/main">
   <p:cSld>
     <p:spTree>
@@ -8078,7 +9700,7 @@
 </p:sld>
 </file>
 
-<file path=ppt/slides/slide14.xml><?xml version="1.0" encoding="utf-8"?>
+<file path=ppt/slides/slide18.xml><?xml version="1.0" encoding="utf-8"?>
 <p:sld xmlns:a="http://schemas.openxmlformats.org/drawingml/2006/main" xmlns:r="http://schemas.openxmlformats.org/officeDocument/2006/relationships" xmlns:p="http://schemas.openxmlformats.org/presentationml/2006/main">
   <p:cSld>
     <p:spTree>
@@ -8622,7 +10244,7 @@
 </p:sld>
 </file>
 
-<file path=ppt/slides/slide15.xml><?xml version="1.0" encoding="utf-8"?>
+<file path=ppt/slides/slide19.xml><?xml version="1.0" encoding="utf-8"?>
 <p:sld xmlns:a="http://schemas.openxmlformats.org/drawingml/2006/main" xmlns:r="http://schemas.openxmlformats.org/officeDocument/2006/relationships" xmlns:p="http://schemas.openxmlformats.org/presentationml/2006/main">
   <p:cSld>
     <p:spTree>
@@ -8995,7 +10617,195 @@
 </p:sld>
 </file>
 
-<file path=ppt/slides/slide16.xml><?xml version="1.0" encoding="utf-8"?>
+<file path=ppt/slides/slide2.xml><?xml version="1.0" encoding="utf-8"?>
+<p:sld xmlns:a="http://schemas.openxmlformats.org/drawingml/2006/main" xmlns:r="http://schemas.openxmlformats.org/officeDocument/2006/relationships" xmlns:p="http://schemas.openxmlformats.org/presentationml/2006/main">
+  <p:cSld>
+    <p:spTree>
+      <p:nvGrpSpPr>
+        <p:cNvPr id="1" name=""/>
+        <p:cNvGrpSpPr/>
+        <p:nvPr/>
+      </p:nvGrpSpPr>
+      <p:grpSpPr>
+        <a:xfrm>
+          <a:off x="0" y="0"/>
+          <a:ext cx="0" cy="0"/>
+          <a:chOff x="0" y="0"/>
+          <a:chExt cx="0" cy="0"/>
+        </a:xfrm>
+      </p:grpSpPr>
+      <p:sp>
+        <p:nvSpPr>
+          <p:cNvPr id="2" name="Title 1">
+            <a:extLst>
+              <a:ext uri="{FF2B5EF4-FFF2-40B4-BE49-F238E27FC236}">
+                <a16:creationId xmlns:a16="http://schemas.microsoft.com/office/drawing/2014/main" id="{10D330C2-52A4-1ABA-980B-56FBC97F350C}"/>
+              </a:ext>
+            </a:extLst>
+          </p:cNvPr>
+          <p:cNvSpPr>
+            <a:spLocks noGrp="1"/>
+          </p:cNvSpPr>
+          <p:nvPr>
+            <p:ph type="title"/>
+          </p:nvPr>
+        </p:nvSpPr>
+        <p:spPr/>
+        <p:txBody>
+          <a:bodyPr/>
+          <a:lstStyle/>
+          <a:p>
+            <a:r>
+              <a:rPr lang="en-US" dirty="0"/>
+              <a:t>Plan for Today</a:t>
+            </a:r>
+          </a:p>
+        </p:txBody>
+      </p:sp>
+      <p:sp>
+        <p:nvSpPr>
+          <p:cNvPr id="3" name="Content Placeholder 2">
+            <a:extLst>
+              <a:ext uri="{FF2B5EF4-FFF2-40B4-BE49-F238E27FC236}">
+                <a16:creationId xmlns:a16="http://schemas.microsoft.com/office/drawing/2014/main" id="{9EAE50F6-429C-715A-C25C-1C7744AED1CF}"/>
+              </a:ext>
+            </a:extLst>
+          </p:cNvPr>
+          <p:cNvSpPr>
+            <a:spLocks noGrp="1"/>
+          </p:cNvSpPr>
+          <p:nvPr>
+            <p:ph idx="1"/>
+          </p:nvPr>
+        </p:nvSpPr>
+        <p:spPr/>
+        <p:txBody>
+          <a:bodyPr>
+            <a:normAutofit/>
+          </a:bodyPr>
+          <a:lstStyle/>
+          <a:p>
+            <a:pPr>
+              <a:lnSpc>
+                <a:spcPct val="150000"/>
+              </a:lnSpc>
+              <a:spcBef>
+                <a:spcPts val="0"/>
+              </a:spcBef>
+              <a:buSzPts val="2040"/>
+              <a:buFont typeface="Arial"/>
+              <a:buChar char="•"/>
+            </a:pPr>
+            <a:r>
+              <a:rPr lang="en-US" sz="2400" dirty="0">
+                <a:cs typeface="Arial"/>
+                <a:sym typeface="Arial"/>
+              </a:rPr>
+              <a:t>Mid-Semester Project wrap-up</a:t>
+            </a:r>
+          </a:p>
+          <a:p>
+            <a:pPr>
+              <a:lnSpc>
+                <a:spcPct val="150000"/>
+              </a:lnSpc>
+              <a:spcBef>
+                <a:spcPts val="0"/>
+              </a:spcBef>
+              <a:buSzPts val="2040"/>
+              <a:buFont typeface="Arial"/>
+              <a:buChar char="•"/>
+            </a:pPr>
+            <a:r>
+              <a:rPr lang="en-US" sz="2400" dirty="0">
+                <a:cs typeface="Arial"/>
+                <a:sym typeface="Arial"/>
+              </a:rPr>
+              <a:t>What is text data?</a:t>
+            </a:r>
+            <a:endParaRPr lang="en-US" sz="2400" dirty="0">
+              <a:cs typeface="Arial"/>
+            </a:endParaRPr>
+          </a:p>
+          <a:p>
+            <a:pPr>
+              <a:lnSpc>
+                <a:spcPct val="100000"/>
+              </a:lnSpc>
+              <a:buSzPts val="2040"/>
+              <a:buFont typeface="Arial"/>
+              <a:buChar char="•"/>
+            </a:pPr>
+            <a:r>
+              <a:rPr lang="en-US" sz="2400" dirty="0">
+                <a:cs typeface="Arial"/>
+                <a:sym typeface="Arial"/>
+              </a:rPr>
+              <a:t>Why visualize </a:t>
+            </a:r>
+            <a:r>
+              <a:rPr lang="en-US" sz="2400" dirty="0">
+                <a:ea typeface="Arial"/>
+                <a:cs typeface="Arial"/>
+                <a:sym typeface="Arial"/>
+              </a:rPr>
+              <a:t>text?</a:t>
+            </a:r>
+            <a:endParaRPr lang="en-US" sz="2400" dirty="0"/>
+          </a:p>
+          <a:p>
+            <a:pPr>
+              <a:lnSpc>
+                <a:spcPct val="100000"/>
+              </a:lnSpc>
+              <a:buSzPts val="2040"/>
+              <a:buFont typeface="Arial"/>
+              <a:buChar char="•"/>
+            </a:pPr>
+            <a:r>
+              <a:rPr lang="en-US" sz="2400" dirty="0">
+                <a:ea typeface="Arial"/>
+                <a:cs typeface="Arial"/>
+                <a:sym typeface="Arial"/>
+              </a:rPr>
+              <a:t>Techniques</a:t>
+            </a:r>
+            <a:endParaRPr lang="en-US" sz="2400" dirty="0"/>
+          </a:p>
+          <a:p>
+            <a:pPr>
+              <a:lnSpc>
+                <a:spcPct val="100000"/>
+              </a:lnSpc>
+              <a:buSzPts val="2040"/>
+              <a:buFont typeface="Arial"/>
+              <a:buChar char="•"/>
+            </a:pPr>
+            <a:r>
+              <a:rPr lang="en-US" sz="2400" dirty="0">
+                <a:ea typeface="Arial"/>
+                <a:cs typeface="Arial"/>
+                <a:sym typeface="Arial"/>
+              </a:rPr>
+              <a:t>Activity (time permitting) </a:t>
+            </a:r>
+          </a:p>
+        </p:txBody>
+      </p:sp>
+    </p:spTree>
+    <p:extLst>
+      <p:ext uri="{BB962C8B-B14F-4D97-AF65-F5344CB8AC3E}">
+        <p14:creationId xmlns:p14="http://schemas.microsoft.com/office/powerpoint/2010/main" val="1085546165"/>
+      </p:ext>
+    </p:extLst>
+  </p:cSld>
+  <p:clrMapOvr>
+    <a:masterClrMapping/>
+  </p:clrMapOvr>
+</p:sld>
+</file>
+
+<file path=ppt/slides/slide20.xml><?xml version="1.0" encoding="utf-8"?>
 <p:sld xmlns:a="http://schemas.openxmlformats.org/drawingml/2006/main" xmlns:r="http://schemas.openxmlformats.org/officeDocument/2006/relationships" xmlns:p="http://schemas.openxmlformats.org/presentationml/2006/main">
   <p:cSld>
     <p:spTree>
@@ -9218,7 +11028,7 @@
 </p:sld>
 </file>
 
-<file path=ppt/slides/slide17.xml><?xml version="1.0" encoding="utf-8"?>
+<file path=ppt/slides/slide21.xml><?xml version="1.0" encoding="utf-8"?>
 <p:sld xmlns:a="http://schemas.openxmlformats.org/drawingml/2006/main" xmlns:r="http://schemas.openxmlformats.org/officeDocument/2006/relationships" xmlns:p="http://schemas.openxmlformats.org/presentationml/2006/main">
   <p:cSld>
     <p:spTree>
@@ -9429,7 +11239,7 @@
 </p:sld>
 </file>
 
-<file path=ppt/slides/slide18.xml><?xml version="1.0" encoding="utf-8"?>
+<file path=ppt/slides/slide22.xml><?xml version="1.0" encoding="utf-8"?>
 <p:sld xmlns:a="http://schemas.openxmlformats.org/drawingml/2006/main" xmlns:r="http://schemas.openxmlformats.org/officeDocument/2006/relationships" xmlns:p="http://schemas.openxmlformats.org/presentationml/2006/main">
   <p:cSld>
     <p:spTree>
@@ -9702,7 +11512,7 @@
 </p:sld>
 </file>
 
-<file path=ppt/slides/slide19.xml><?xml version="1.0" encoding="utf-8"?>
+<file path=ppt/slides/slide23.xml><?xml version="1.0" encoding="utf-8"?>
 <p:sld xmlns:a="http://schemas.openxmlformats.org/drawingml/2006/main" xmlns:r="http://schemas.openxmlformats.org/officeDocument/2006/relationships" xmlns:p="http://schemas.openxmlformats.org/presentationml/2006/main">
   <p:cSld>
     <p:spTree>
@@ -9861,167 +11671,7 @@
 </p:sld>
 </file>
 
-<file path=ppt/slides/slide2.xml><?xml version="1.0" encoding="utf-8"?>
-<p:sld xmlns:a="http://schemas.openxmlformats.org/drawingml/2006/main" xmlns:r="http://schemas.openxmlformats.org/officeDocument/2006/relationships" xmlns:p="http://schemas.openxmlformats.org/presentationml/2006/main">
-  <p:cSld>
-    <p:spTree>
-      <p:nvGrpSpPr>
-        <p:cNvPr id="1" name=""/>
-        <p:cNvGrpSpPr/>
-        <p:nvPr/>
-      </p:nvGrpSpPr>
-      <p:grpSpPr>
-        <a:xfrm>
-          <a:off x="0" y="0"/>
-          <a:ext cx="0" cy="0"/>
-          <a:chOff x="0" y="0"/>
-          <a:chExt cx="0" cy="0"/>
-        </a:xfrm>
-      </p:grpSpPr>
-      <p:sp>
-        <p:nvSpPr>
-          <p:cNvPr id="2" name="Title 1">
-            <a:extLst>
-              <a:ext uri="{FF2B5EF4-FFF2-40B4-BE49-F238E27FC236}">
-                <a16:creationId xmlns:a16="http://schemas.microsoft.com/office/drawing/2014/main" id="{10D330C2-52A4-1ABA-980B-56FBC97F350C}"/>
-              </a:ext>
-            </a:extLst>
-          </p:cNvPr>
-          <p:cNvSpPr>
-            <a:spLocks noGrp="1"/>
-          </p:cNvSpPr>
-          <p:nvPr>
-            <p:ph type="title"/>
-          </p:nvPr>
-        </p:nvSpPr>
-        <p:spPr/>
-        <p:txBody>
-          <a:bodyPr/>
-          <a:lstStyle/>
-          <a:p>
-            <a:r>
-              <a:rPr lang="en-US" dirty="0"/>
-              <a:t>Plan for Today</a:t>
-            </a:r>
-          </a:p>
-        </p:txBody>
-      </p:sp>
-      <p:sp>
-        <p:nvSpPr>
-          <p:cNvPr id="3" name="Content Placeholder 2">
-            <a:extLst>
-              <a:ext uri="{FF2B5EF4-FFF2-40B4-BE49-F238E27FC236}">
-                <a16:creationId xmlns:a16="http://schemas.microsoft.com/office/drawing/2014/main" id="{9EAE50F6-429C-715A-C25C-1C7744AED1CF}"/>
-              </a:ext>
-            </a:extLst>
-          </p:cNvPr>
-          <p:cNvSpPr>
-            <a:spLocks noGrp="1"/>
-          </p:cNvSpPr>
-          <p:nvPr>
-            <p:ph idx="1"/>
-          </p:nvPr>
-        </p:nvSpPr>
-        <p:spPr/>
-        <p:txBody>
-          <a:bodyPr>
-            <a:normAutofit/>
-          </a:bodyPr>
-          <a:lstStyle/>
-          <a:p>
-            <a:pPr>
-              <a:lnSpc>
-                <a:spcPct val="100000"/>
-              </a:lnSpc>
-              <a:spcBef>
-                <a:spcPts val="0"/>
-              </a:spcBef>
-              <a:buSzPts val="2040"/>
-              <a:buFont typeface="Arial"/>
-              <a:buChar char="•"/>
-            </a:pPr>
-            <a:r>
-              <a:rPr lang="en-US" sz="2400" dirty="0">
-                <a:ea typeface="Arial"/>
-                <a:cs typeface="Arial"/>
-                <a:sym typeface="Arial"/>
-              </a:rPr>
-              <a:t>What is text data?</a:t>
-            </a:r>
-            <a:endParaRPr lang="en-US" sz="2400" dirty="0"/>
-          </a:p>
-          <a:p>
-            <a:pPr>
-              <a:lnSpc>
-                <a:spcPct val="100000"/>
-              </a:lnSpc>
-              <a:buSzPts val="2040"/>
-              <a:buFont typeface="Arial"/>
-              <a:buChar char="•"/>
-            </a:pPr>
-            <a:r>
-              <a:rPr lang="en-US" sz="2400" dirty="0">
-                <a:ea typeface="Arial"/>
-                <a:cs typeface="Arial"/>
-                <a:sym typeface="Arial"/>
-              </a:rPr>
-              <a:t>Why visualize text?</a:t>
-            </a:r>
-            <a:endParaRPr lang="en-US" sz="2400" dirty="0"/>
-          </a:p>
-          <a:p>
-            <a:pPr>
-              <a:lnSpc>
-                <a:spcPct val="100000"/>
-              </a:lnSpc>
-              <a:buSzPts val="2040"/>
-              <a:buFont typeface="Arial"/>
-              <a:buChar char="•"/>
-            </a:pPr>
-            <a:r>
-              <a:rPr lang="en-US" sz="2400" dirty="0">
-                <a:ea typeface="Arial"/>
-                <a:cs typeface="Arial"/>
-                <a:sym typeface="Arial"/>
-              </a:rPr>
-              <a:t>Techniques</a:t>
-            </a:r>
-            <a:endParaRPr lang="en-US" sz="2400" dirty="0"/>
-          </a:p>
-          <a:p>
-            <a:pPr>
-              <a:lnSpc>
-                <a:spcPct val="100000"/>
-              </a:lnSpc>
-              <a:buSzPts val="2040"/>
-              <a:buFont typeface="Arial"/>
-              <a:buChar char="•"/>
-            </a:pPr>
-            <a:r>
-              <a:rPr lang="en-US" sz="2400" dirty="0">
-                <a:ea typeface="Arial"/>
-                <a:cs typeface="Arial"/>
-                <a:sym typeface="Arial"/>
-              </a:rPr>
-              <a:t>Activity</a:t>
-            </a:r>
-          </a:p>
-        </p:txBody>
-      </p:sp>
-    </p:spTree>
-    <p:extLst>
-      <p:ext uri="{BB962C8B-B14F-4D97-AF65-F5344CB8AC3E}">
-        <p14:creationId xmlns:p14="http://schemas.microsoft.com/office/powerpoint/2010/main" val="1085546165"/>
-      </p:ext>
-    </p:extLst>
-  </p:cSld>
-  <p:clrMapOvr>
-    <a:masterClrMapping/>
-  </p:clrMapOvr>
-</p:sld>
-</file>
-
-<file path=ppt/slides/slide20.xml><?xml version="1.0" encoding="utf-8"?>
+<file path=ppt/slides/slide24.xml><?xml version="1.0" encoding="utf-8"?>
 <p:sld xmlns:a="http://schemas.openxmlformats.org/drawingml/2006/main" xmlns:r="http://schemas.openxmlformats.org/officeDocument/2006/relationships" xmlns:p="http://schemas.openxmlformats.org/presentationml/2006/main">
   <p:cSld>
     <p:spTree>
@@ -10176,7 +11826,7 @@
 </p:sld>
 </file>
 
-<file path=ppt/slides/slide21.xml><?xml version="1.0" encoding="utf-8"?>
+<file path=ppt/slides/slide25.xml><?xml version="1.0" encoding="utf-8"?>
 <p:sld xmlns:a="http://schemas.openxmlformats.org/drawingml/2006/main" xmlns:r="http://schemas.openxmlformats.org/officeDocument/2006/relationships" xmlns:p="http://schemas.openxmlformats.org/presentationml/2006/main">
   <p:cSld>
     <p:spTree>
@@ -10352,7 +12002,7 @@
 </p:sld>
 </file>
 
-<file path=ppt/slides/slide22.xml><?xml version="1.0" encoding="utf-8"?>
+<file path=ppt/slides/slide26.xml><?xml version="1.0" encoding="utf-8"?>
 <p:sld xmlns:a="http://schemas.openxmlformats.org/drawingml/2006/main" xmlns:r="http://schemas.openxmlformats.org/officeDocument/2006/relationships" xmlns:p="http://schemas.openxmlformats.org/presentationml/2006/main">
   <p:cSld>
     <p:spTree>
@@ -10532,7 +12182,7 @@
 </p:sld>
 </file>
 
-<file path=ppt/slides/slide23.xml><?xml version="1.0" encoding="utf-8"?>
+<file path=ppt/slides/slide27.xml><?xml version="1.0" encoding="utf-8"?>
 <p:sld xmlns:a="http://schemas.openxmlformats.org/drawingml/2006/main" xmlns:r="http://schemas.openxmlformats.org/officeDocument/2006/relationships" xmlns:p="http://schemas.openxmlformats.org/presentationml/2006/main">
   <p:cSld>
     <p:spTree>
@@ -10712,7 +12362,7 @@
 </p:sld>
 </file>
 
-<file path=ppt/slides/slide24.xml><?xml version="1.0" encoding="utf-8"?>
+<file path=ppt/slides/slide28.xml><?xml version="1.0" encoding="utf-8"?>
 <p:sld xmlns:a="http://schemas.openxmlformats.org/drawingml/2006/main" xmlns:r="http://schemas.openxmlformats.org/officeDocument/2006/relationships" xmlns:p="http://schemas.openxmlformats.org/presentationml/2006/main">
   <p:cSld>
     <p:spTree>
@@ -10892,7 +12542,7 @@
 </p:sld>
 </file>
 
-<file path=ppt/slides/slide25.xml><?xml version="1.0" encoding="utf-8"?>
+<file path=ppt/slides/slide29.xml><?xml version="1.0" encoding="utf-8"?>
 <p:sld xmlns:a="http://schemas.openxmlformats.org/drawingml/2006/main" xmlns:r="http://schemas.openxmlformats.org/officeDocument/2006/relationships" xmlns:p="http://schemas.openxmlformats.org/presentationml/2006/main">
   <p:cSld>
     <p:spTree>
@@ -11094,7 +12744,158 @@
 </p:sld>
 </file>
 
-<file path=ppt/slides/slide26.xml><?xml version="1.0" encoding="utf-8"?>
+<file path=ppt/slides/slide3.xml><?xml version="1.0" encoding="utf-8"?>
+<p:sld xmlns:a="http://schemas.openxmlformats.org/drawingml/2006/main" xmlns:r="http://schemas.openxmlformats.org/officeDocument/2006/relationships" xmlns:p="http://schemas.openxmlformats.org/presentationml/2006/main">
+  <p:cSld>
+    <p:spTree>
+      <p:nvGrpSpPr>
+        <p:cNvPr id="1" name="">
+          <a:extLst>
+            <a:ext uri="{FF2B5EF4-FFF2-40B4-BE49-F238E27FC236}">
+              <a16:creationId xmlns:a16="http://schemas.microsoft.com/office/drawing/2014/main" id="{EC8545AA-0487-FE65-FDBD-1F94A239D98A}"/>
+            </a:ext>
+          </a:extLst>
+        </p:cNvPr>
+        <p:cNvGrpSpPr/>
+        <p:nvPr/>
+      </p:nvGrpSpPr>
+      <p:grpSpPr>
+        <a:xfrm>
+          <a:off x="0" y="0"/>
+          <a:ext cx="0" cy="0"/>
+          <a:chOff x="0" y="0"/>
+          <a:chExt cx="0" cy="0"/>
+        </a:xfrm>
+      </p:grpSpPr>
+      <p:sp>
+        <p:nvSpPr>
+          <p:cNvPr id="2" name="Title 1">
+            <a:extLst>
+              <a:ext uri="{FF2B5EF4-FFF2-40B4-BE49-F238E27FC236}">
+                <a16:creationId xmlns:a16="http://schemas.microsoft.com/office/drawing/2014/main" id="{70473302-47F3-A7A1-4891-3BDF7227C771}"/>
+              </a:ext>
+            </a:extLst>
+          </p:cNvPr>
+          <p:cNvSpPr>
+            <a:spLocks noGrp="1"/>
+          </p:cNvSpPr>
+          <p:nvPr>
+            <p:ph type="title"/>
+          </p:nvPr>
+        </p:nvSpPr>
+        <p:spPr/>
+        <p:txBody>
+          <a:bodyPr/>
+          <a:lstStyle/>
+          <a:p>
+            <a:r>
+              <a:rPr lang="en-US" dirty="0"/>
+              <a:t>Mid-Semester Project Data Exploration</a:t>
+            </a:r>
+          </a:p>
+        </p:txBody>
+      </p:sp>
+      <p:sp>
+        <p:nvSpPr>
+          <p:cNvPr id="3" name="Content Placeholder 2">
+            <a:extLst>
+              <a:ext uri="{FF2B5EF4-FFF2-40B4-BE49-F238E27FC236}">
+                <a16:creationId xmlns:a16="http://schemas.microsoft.com/office/drawing/2014/main" id="{665C501D-B444-91B3-22E2-93679F44968C}"/>
+              </a:ext>
+            </a:extLst>
+          </p:cNvPr>
+          <p:cNvSpPr>
+            <a:spLocks noGrp="1"/>
+          </p:cNvSpPr>
+          <p:nvPr>
+            <p:ph idx="1"/>
+          </p:nvPr>
+        </p:nvSpPr>
+        <p:spPr/>
+        <p:txBody>
+          <a:bodyPr>
+            <a:normAutofit/>
+          </a:bodyPr>
+          <a:lstStyle/>
+          <a:p>
+            <a:pPr>
+              <a:lnSpc>
+                <a:spcPct val="150000"/>
+              </a:lnSpc>
+              <a:spcBef>
+                <a:spcPts val="0"/>
+              </a:spcBef>
+              <a:buSzPts val="2040"/>
+              <a:buFont typeface="Arial"/>
+              <a:buChar char="•"/>
+            </a:pPr>
+            <a:r>
+              <a:rPr lang="en-US" sz="2400" dirty="0">
+                <a:ea typeface="Arial"/>
+                <a:cs typeface="Arial"/>
+                <a:sym typeface="Arial"/>
+              </a:rPr>
+              <a:t>Download the mid-semester project dataset from Slack</a:t>
+            </a:r>
+          </a:p>
+          <a:p>
+            <a:pPr>
+              <a:lnSpc>
+                <a:spcPct val="150000"/>
+              </a:lnSpc>
+              <a:spcBef>
+                <a:spcPts val="0"/>
+              </a:spcBef>
+              <a:buSzPts val="2040"/>
+              <a:buFont typeface="Arial"/>
+              <a:buChar char="•"/>
+            </a:pPr>
+            <a:r>
+              <a:rPr lang="en-US" sz="2400" dirty="0">
+                <a:ea typeface="Arial"/>
+                <a:cs typeface="Arial"/>
+                <a:sym typeface="Arial"/>
+              </a:rPr>
+              <a:t>Explore the data using (simple) visualizations</a:t>
+            </a:r>
+          </a:p>
+          <a:p>
+            <a:pPr>
+              <a:lnSpc>
+                <a:spcPct val="150000"/>
+              </a:lnSpc>
+              <a:spcBef>
+                <a:spcPts val="0"/>
+              </a:spcBef>
+              <a:buSzPts val="2040"/>
+              <a:buFont typeface="Arial"/>
+              <a:buChar char="•"/>
+            </a:pPr>
+            <a:r>
+              <a:rPr lang="en-US" sz="2400" dirty="0">
+                <a:ea typeface="Arial"/>
+                <a:cs typeface="Arial"/>
+                <a:sym typeface="Arial"/>
+              </a:rPr>
+              <a:t>Identify three interesting things in the data</a:t>
+            </a:r>
+          </a:p>
+        </p:txBody>
+      </p:sp>
+    </p:spTree>
+    <p:extLst>
+      <p:ext uri="{BB962C8B-B14F-4D97-AF65-F5344CB8AC3E}">
+        <p14:creationId xmlns:p14="http://schemas.microsoft.com/office/powerpoint/2010/main" val="2876860983"/>
+      </p:ext>
+    </p:extLst>
+  </p:cSld>
+  <p:clrMapOvr>
+    <a:masterClrMapping/>
+  </p:clrMapOvr>
+</p:sld>
+</file>
+
+<file path=ppt/slides/slide30.xml><?xml version="1.0" encoding="utf-8"?>
 <p:sld xmlns:a="http://schemas.openxmlformats.org/drawingml/2006/main" xmlns:r="http://schemas.openxmlformats.org/officeDocument/2006/relationships" xmlns:p="http://schemas.openxmlformats.org/presentationml/2006/main">
   <p:cSld>
     <p:spTree>
@@ -11443,7 +13244,309 @@
 </p:sld>
 </file>
 
-<file path=ppt/slides/slide3.xml><?xml version="1.0" encoding="utf-8"?>
+<file path=ppt/slides/slide4.xml><?xml version="1.0" encoding="utf-8"?>
+<p:sld xmlns:a="http://schemas.openxmlformats.org/drawingml/2006/main" xmlns:r="http://schemas.openxmlformats.org/officeDocument/2006/relationships" xmlns:p="http://schemas.openxmlformats.org/presentationml/2006/main">
+  <p:cSld>
+    <p:spTree>
+      <p:nvGrpSpPr>
+        <p:cNvPr id="1" name="">
+          <a:extLst>
+            <a:ext uri="{FF2B5EF4-FFF2-40B4-BE49-F238E27FC236}">
+              <a16:creationId xmlns:a16="http://schemas.microsoft.com/office/drawing/2014/main" id="{ECA2C137-90C4-840C-E735-6876D1E110A7}"/>
+            </a:ext>
+          </a:extLst>
+        </p:cNvPr>
+        <p:cNvGrpSpPr/>
+        <p:nvPr/>
+      </p:nvGrpSpPr>
+      <p:grpSpPr>
+        <a:xfrm>
+          <a:off x="0" y="0"/>
+          <a:ext cx="0" cy="0"/>
+          <a:chOff x="0" y="0"/>
+          <a:chExt cx="0" cy="0"/>
+        </a:xfrm>
+      </p:grpSpPr>
+      <p:sp>
+        <p:nvSpPr>
+          <p:cNvPr id="2" name="Title 1">
+            <a:extLst>
+              <a:ext uri="{FF2B5EF4-FFF2-40B4-BE49-F238E27FC236}">
+                <a16:creationId xmlns:a16="http://schemas.microsoft.com/office/drawing/2014/main" id="{A5AF82D1-71A0-4933-F838-E31599105179}"/>
+              </a:ext>
+            </a:extLst>
+          </p:cNvPr>
+          <p:cNvSpPr>
+            <a:spLocks noGrp="1"/>
+          </p:cNvSpPr>
+          <p:nvPr>
+            <p:ph type="title"/>
+          </p:nvPr>
+        </p:nvSpPr>
+        <p:spPr/>
+        <p:txBody>
+          <a:bodyPr/>
+          <a:lstStyle/>
+          <a:p>
+            <a:r>
+              <a:rPr lang="en-US" dirty="0"/>
+              <a:t>Mid-Semester Project Data Exploration</a:t>
+            </a:r>
+          </a:p>
+        </p:txBody>
+      </p:sp>
+      <p:sp>
+        <p:nvSpPr>
+          <p:cNvPr id="3" name="Content Placeholder 2">
+            <a:extLst>
+              <a:ext uri="{FF2B5EF4-FFF2-40B4-BE49-F238E27FC236}">
+                <a16:creationId xmlns:a16="http://schemas.microsoft.com/office/drawing/2014/main" id="{0643550D-519E-FF34-2A7C-F9D2A79952FB}"/>
+              </a:ext>
+            </a:extLst>
+          </p:cNvPr>
+          <p:cNvSpPr>
+            <a:spLocks noGrp="1"/>
+          </p:cNvSpPr>
+          <p:nvPr>
+            <p:ph idx="1"/>
+          </p:nvPr>
+        </p:nvSpPr>
+        <p:spPr/>
+        <p:txBody>
+          <a:bodyPr>
+            <a:normAutofit/>
+          </a:bodyPr>
+          <a:lstStyle/>
+          <a:p>
+            <a:pPr>
+              <a:lnSpc>
+                <a:spcPct val="150000"/>
+              </a:lnSpc>
+              <a:spcBef>
+                <a:spcPts val="0"/>
+              </a:spcBef>
+              <a:buSzPts val="2040"/>
+              <a:buFont typeface="Arial"/>
+              <a:buChar char="•"/>
+            </a:pPr>
+            <a:r>
+              <a:rPr lang="en-US" sz="2400" dirty="0">
+                <a:ea typeface="Arial"/>
+                <a:cs typeface="Arial"/>
+                <a:sym typeface="Arial"/>
+              </a:rPr>
+              <a:t>Pair up with someone across the room</a:t>
+            </a:r>
+          </a:p>
+          <a:p>
+            <a:pPr>
+              <a:lnSpc>
+                <a:spcPct val="150000"/>
+              </a:lnSpc>
+              <a:spcBef>
+                <a:spcPts val="0"/>
+              </a:spcBef>
+              <a:buSzPts val="2040"/>
+              <a:buFont typeface="Arial"/>
+              <a:buChar char="•"/>
+            </a:pPr>
+            <a:r>
+              <a:rPr lang="en-US" sz="2400" dirty="0">
+                <a:ea typeface="Arial"/>
+                <a:cs typeface="Arial"/>
+                <a:sym typeface="Arial"/>
+              </a:rPr>
+              <a:t>Share the three interesting things you found </a:t>
+            </a:r>
+          </a:p>
+          <a:p>
+            <a:pPr>
+              <a:lnSpc>
+                <a:spcPct val="150000"/>
+              </a:lnSpc>
+              <a:spcBef>
+                <a:spcPts val="0"/>
+              </a:spcBef>
+              <a:buSzPts val="2040"/>
+              <a:buFont typeface="Arial"/>
+              <a:buChar char="•"/>
+            </a:pPr>
+            <a:r>
+              <a:rPr lang="en-US" sz="2400" dirty="0">
+                <a:ea typeface="Arial"/>
+                <a:cs typeface="Arial"/>
+                <a:sym typeface="Arial"/>
+              </a:rPr>
+              <a:t>What new analysis questions do you have?</a:t>
+            </a:r>
+          </a:p>
+        </p:txBody>
+      </p:sp>
+    </p:spTree>
+    <p:extLst>
+      <p:ext uri="{BB962C8B-B14F-4D97-AF65-F5344CB8AC3E}">
+        <p14:creationId xmlns:p14="http://schemas.microsoft.com/office/powerpoint/2010/main" val="2610317025"/>
+      </p:ext>
+    </p:extLst>
+  </p:cSld>
+  <p:clrMapOvr>
+    <a:masterClrMapping/>
+  </p:clrMapOvr>
+</p:sld>
+</file>
+
+<file path=ppt/slides/slide5.xml><?xml version="1.0" encoding="utf-8"?>
+<p:sld xmlns:a="http://schemas.openxmlformats.org/drawingml/2006/main" xmlns:r="http://schemas.openxmlformats.org/officeDocument/2006/relationships" xmlns:p="http://schemas.openxmlformats.org/presentationml/2006/main">
+  <p:cSld>
+    <p:spTree>
+      <p:nvGrpSpPr>
+        <p:cNvPr id="1" name="">
+          <a:extLst>
+            <a:ext uri="{FF2B5EF4-FFF2-40B4-BE49-F238E27FC236}">
+              <a16:creationId xmlns:a16="http://schemas.microsoft.com/office/drawing/2014/main" id="{9D90AEE8-F48C-FE40-95BD-2E9DF4F5B684}"/>
+            </a:ext>
+          </a:extLst>
+        </p:cNvPr>
+        <p:cNvGrpSpPr/>
+        <p:nvPr/>
+      </p:nvGrpSpPr>
+      <p:grpSpPr>
+        <a:xfrm>
+          <a:off x="0" y="0"/>
+          <a:ext cx="0" cy="0"/>
+          <a:chOff x="0" y="0"/>
+          <a:chExt cx="0" cy="0"/>
+        </a:xfrm>
+      </p:grpSpPr>
+      <p:sp>
+        <p:nvSpPr>
+          <p:cNvPr id="2" name="Title 1">
+            <a:extLst>
+              <a:ext uri="{FF2B5EF4-FFF2-40B4-BE49-F238E27FC236}">
+                <a16:creationId xmlns:a16="http://schemas.microsoft.com/office/drawing/2014/main" id="{75A055A3-B5DF-6ED4-1D5F-D4022B407AF0}"/>
+              </a:ext>
+            </a:extLst>
+          </p:cNvPr>
+          <p:cNvSpPr>
+            <a:spLocks noGrp="1"/>
+          </p:cNvSpPr>
+          <p:nvPr>
+            <p:ph type="title"/>
+          </p:nvPr>
+        </p:nvSpPr>
+        <p:spPr/>
+        <p:txBody>
+          <a:bodyPr/>
+          <a:lstStyle/>
+          <a:p>
+            <a:r>
+              <a:rPr lang="en-US" dirty="0"/>
+              <a:t>Mid-Semester Project Data Exploration</a:t>
+            </a:r>
+          </a:p>
+        </p:txBody>
+      </p:sp>
+      <p:sp>
+        <p:nvSpPr>
+          <p:cNvPr id="3" name="Content Placeholder 2">
+            <a:extLst>
+              <a:ext uri="{FF2B5EF4-FFF2-40B4-BE49-F238E27FC236}">
+                <a16:creationId xmlns:a16="http://schemas.microsoft.com/office/drawing/2014/main" id="{397B3A9B-BC18-5D68-E897-08D4F45FEBD0}"/>
+              </a:ext>
+            </a:extLst>
+          </p:cNvPr>
+          <p:cNvSpPr>
+            <a:spLocks noGrp="1"/>
+          </p:cNvSpPr>
+          <p:nvPr>
+            <p:ph idx="1"/>
+          </p:nvPr>
+        </p:nvSpPr>
+        <p:spPr/>
+        <p:txBody>
+          <a:bodyPr>
+            <a:normAutofit/>
+          </a:bodyPr>
+          <a:lstStyle/>
+          <a:p>
+            <a:pPr>
+              <a:lnSpc>
+                <a:spcPct val="150000"/>
+              </a:lnSpc>
+              <a:spcBef>
+                <a:spcPts val="0"/>
+              </a:spcBef>
+              <a:buSzPts val="2040"/>
+              <a:buFont typeface="Arial"/>
+              <a:buChar char="•"/>
+            </a:pPr>
+            <a:r>
+              <a:rPr lang="en-US" sz="2400" dirty="0">
+                <a:ea typeface="Arial"/>
+                <a:cs typeface="Arial"/>
+                <a:sym typeface="Arial"/>
+              </a:rPr>
+              <a:t>Class-wide share:</a:t>
+            </a:r>
+          </a:p>
+          <a:p>
+            <a:pPr lvl="1">
+              <a:lnSpc>
+                <a:spcPct val="150000"/>
+              </a:lnSpc>
+              <a:spcBef>
+                <a:spcPts val="0"/>
+              </a:spcBef>
+              <a:buSzPts val="2040"/>
+              <a:buFont typeface="Arial"/>
+              <a:buChar char="•"/>
+            </a:pPr>
+            <a:r>
+              <a:rPr lang="en-US" sz="2200" dirty="0">
+                <a:ea typeface="Arial"/>
+                <a:cs typeface="Arial"/>
+                <a:sym typeface="Arial"/>
+              </a:rPr>
+              <a:t>What did you find in the data?</a:t>
+            </a:r>
+          </a:p>
+          <a:p>
+            <a:pPr lvl="1">
+              <a:lnSpc>
+                <a:spcPct val="150000"/>
+              </a:lnSpc>
+              <a:spcBef>
+                <a:spcPts val="0"/>
+              </a:spcBef>
+              <a:buSzPts val="2040"/>
+              <a:buFont typeface="Arial"/>
+              <a:buChar char="•"/>
+            </a:pPr>
+            <a:r>
+              <a:rPr lang="en-US" sz="2200" dirty="0">
+                <a:ea typeface="Arial"/>
+                <a:cs typeface="Arial"/>
+                <a:sym typeface="Arial"/>
+              </a:rPr>
+              <a:t>What new questions do you have? </a:t>
+            </a:r>
+          </a:p>
+        </p:txBody>
+      </p:sp>
+    </p:spTree>
+    <p:extLst>
+      <p:ext uri="{BB962C8B-B14F-4D97-AF65-F5344CB8AC3E}">
+        <p14:creationId xmlns:p14="http://schemas.microsoft.com/office/powerpoint/2010/main" val="4227301603"/>
+      </p:ext>
+    </p:extLst>
+  </p:cSld>
+  <p:clrMapOvr>
+    <a:masterClrMapping/>
+  </p:clrMapOvr>
+</p:sld>
+</file>
+
+<file path=ppt/slides/slide6.xml><?xml version="1.0" encoding="utf-8"?>
 <p:sld xmlns:a="http://schemas.openxmlformats.org/drawingml/2006/main" xmlns:r="http://schemas.openxmlformats.org/officeDocument/2006/relationships" xmlns:p="http://schemas.openxmlformats.org/presentationml/2006/main">
   <p:cSld>
     <p:spTree>
@@ -11892,7 +13995,7 @@
 </p:sld>
 </file>
 
-<file path=ppt/slides/slide4.xml><?xml version="1.0" encoding="utf-8"?>
+<file path=ppt/slides/slide7.xml><?xml version="1.0" encoding="utf-8"?>
 <p:sld xmlns:a="http://schemas.openxmlformats.org/drawingml/2006/main" xmlns:r="http://schemas.openxmlformats.org/officeDocument/2006/relationships" xmlns:p="http://schemas.openxmlformats.org/presentationml/2006/main">
   <p:cSld>
     <p:spTree>
@@ -12537,7 +14640,7 @@
 </p:sld>
 </file>
 
-<file path=ppt/slides/slide5.xml><?xml version="1.0" encoding="utf-8"?>
+<file path=ppt/slides/slide8.xml><?xml version="1.0" encoding="utf-8"?>
 <p:sld xmlns:a="http://schemas.openxmlformats.org/drawingml/2006/main" xmlns:r="http://schemas.openxmlformats.org/officeDocument/2006/relationships" xmlns:p="http://schemas.openxmlformats.org/presentationml/2006/main">
   <p:cSld>
     <p:spTree>
@@ -12991,7 +15094,7 @@
 </p:sld>
 </file>
 
-<file path=ppt/slides/slide6.xml><?xml version="1.0" encoding="utf-8"?>
+<file path=ppt/slides/slide9.xml><?xml version="1.0" encoding="utf-8"?>
 <p:sld xmlns:a="http://schemas.openxmlformats.org/drawingml/2006/main" xmlns:r="http://schemas.openxmlformats.org/officeDocument/2006/relationships" xmlns:p="http://schemas.openxmlformats.org/presentationml/2006/main">
   <p:cSld>
     <p:spTree>
@@ -13090,881 +15193,6 @@
             <a:r>
               <a:rPr lang="en-US" sz="3600" dirty="0"/>
               <a:t>How can we quantitatively analyze text data?</a:t>
-            </a:r>
-          </a:p>
-        </p:txBody>
-      </p:sp>
-    </p:spTree>
-  </p:cSld>
-  <p:clrMapOvr>
-    <a:masterClrMapping/>
-  </p:clrMapOvr>
-</p:sld>
-</file>
-
-<file path=ppt/slides/slide7.xml><?xml version="1.0" encoding="utf-8"?>
-<p:sld xmlns:a="http://schemas.openxmlformats.org/drawingml/2006/main" xmlns:r="http://schemas.openxmlformats.org/officeDocument/2006/relationships" xmlns:p="http://schemas.openxmlformats.org/presentationml/2006/main">
-  <p:cSld>
-    <p:spTree>
-      <p:nvGrpSpPr>
-        <p:cNvPr id="1" name="Shape 150">
-          <a:extLst>
-            <a:ext uri="{FF2B5EF4-FFF2-40B4-BE49-F238E27FC236}">
-              <a16:creationId xmlns:a16="http://schemas.microsoft.com/office/drawing/2014/main" id="{AFE2CED8-218D-1BB5-C624-FF81AECBA767}"/>
-            </a:ext>
-          </a:extLst>
-        </p:cNvPr>
-        <p:cNvGrpSpPr/>
-        <p:nvPr/>
-      </p:nvGrpSpPr>
-      <p:grpSpPr>
-        <a:xfrm>
-          <a:off x="0" y="0"/>
-          <a:ext cx="0" cy="0"/>
-          <a:chOff x="0" y="0"/>
-          <a:chExt cx="0" cy="0"/>
-        </a:xfrm>
-      </p:grpSpPr>
-      <p:sp>
-        <p:nvSpPr>
-          <p:cNvPr id="152" name="Google Shape;152;p21">
-            <a:extLst>
-              <a:ext uri="{FF2B5EF4-FFF2-40B4-BE49-F238E27FC236}">
-                <a16:creationId xmlns:a16="http://schemas.microsoft.com/office/drawing/2014/main" id="{84CE2B4D-1458-4993-12B7-C237D5964C08}"/>
-              </a:ext>
-            </a:extLst>
-          </p:cNvPr>
-          <p:cNvSpPr txBox="1">
-            <a:spLocks noGrp="1"/>
-          </p:cNvSpPr>
-          <p:nvPr>
-            <p:ph type="body" idx="1"/>
-          </p:nvPr>
-        </p:nvSpPr>
-        <p:spPr>
-          <a:xfrm>
-            <a:off x="3519054" y="907473"/>
-            <a:ext cx="8229600" cy="4876800"/>
-          </a:xfrm>
-          <a:prstGeom prst="rect">
-            <a:avLst/>
-          </a:prstGeom>
-          <a:noFill/>
-          <a:ln>
-            <a:noFill/>
-          </a:ln>
-        </p:spPr>
-        <p:txBody>
-          <a:bodyPr spcFirstLastPara="1" vert="horz" wrap="square" lIns="91425" tIns="45700" rIns="91425" bIns="45700" rtlCol="0" anchor="t" anchorCtr="0">
-            <a:noAutofit/>
-          </a:bodyPr>
-          <a:lstStyle/>
-          <a:p>
-            <a:pPr>
-              <a:lnSpc>
-                <a:spcPct val="100000"/>
-              </a:lnSpc>
-              <a:spcBef>
-                <a:spcPts val="0"/>
-              </a:spcBef>
-              <a:buSzPts val="2040"/>
-              <a:buFont typeface="Arial"/>
-              <a:buChar char="•"/>
-            </a:pPr>
-            <a:r>
-              <a:rPr lang="en-US" sz="2400" dirty="0">
-                <a:ea typeface="Arial"/>
-                <a:cs typeface="Arial"/>
-                <a:sym typeface="Arial"/>
-              </a:rPr>
-              <a:t>Ignore ordering relationships within the text</a:t>
-            </a:r>
-            <a:endParaRPr sz="2400" dirty="0"/>
-          </a:p>
-          <a:p>
-            <a:pPr>
-              <a:lnSpc>
-                <a:spcPct val="100000"/>
-              </a:lnSpc>
-              <a:buSzPts val="2040"/>
-              <a:buFont typeface="Arial"/>
-              <a:buChar char="•"/>
-            </a:pPr>
-            <a:r>
-              <a:rPr lang="en-US" sz="2400" dirty="0">
-                <a:ea typeface="Arial"/>
-                <a:cs typeface="Arial"/>
-                <a:sym typeface="Arial"/>
-              </a:rPr>
-              <a:t>A document ≈ vector of term weights </a:t>
-            </a:r>
-            <a:endParaRPr sz="2400" dirty="0"/>
-          </a:p>
-          <a:p>
-            <a:pPr marL="457200" lvl="1" indent="-190500">
-              <a:lnSpc>
-                <a:spcPct val="100000"/>
-              </a:lnSpc>
-              <a:spcBef>
-                <a:spcPts val="1200"/>
-              </a:spcBef>
-              <a:spcAft>
-                <a:spcPts val="0"/>
-              </a:spcAft>
-              <a:buSzPts val="1700"/>
-              <a:buFont typeface="Merriweather Sans"/>
-              <a:buChar char="-"/>
-            </a:pPr>
-            <a:r>
-              <a:rPr lang="en-US" sz="2400" dirty="0">
-                <a:ea typeface="Arial"/>
-                <a:cs typeface="Arial"/>
-                <a:sym typeface="Arial"/>
-              </a:rPr>
-              <a:t>Each dimension corresponds to a term (10,000+)</a:t>
-            </a:r>
-            <a:endParaRPr sz="2400" dirty="0"/>
-          </a:p>
-          <a:p>
-            <a:pPr marL="457200" lvl="1" indent="-190500">
-              <a:lnSpc>
-                <a:spcPct val="100000"/>
-              </a:lnSpc>
-              <a:spcBef>
-                <a:spcPts val="1200"/>
-              </a:spcBef>
-              <a:spcAft>
-                <a:spcPts val="0"/>
-              </a:spcAft>
-              <a:buSzPts val="1700"/>
-              <a:buFont typeface="Merriweather Sans"/>
-              <a:buChar char="-"/>
-            </a:pPr>
-            <a:r>
-              <a:rPr lang="en-US" sz="2400" dirty="0">
-                <a:ea typeface="Arial"/>
-                <a:cs typeface="Arial"/>
-                <a:sym typeface="Arial"/>
-              </a:rPr>
-              <a:t>Each value represents the relevance</a:t>
-            </a:r>
-            <a:endParaRPr sz="2400" dirty="0"/>
-          </a:p>
-          <a:p>
-            <a:pPr>
-              <a:lnSpc>
-                <a:spcPct val="100000"/>
-              </a:lnSpc>
-              <a:buSzPts val="2040"/>
-              <a:buFont typeface="Arial"/>
-              <a:buChar char="•"/>
-            </a:pPr>
-            <a:r>
-              <a:rPr lang="en-US" sz="2400" dirty="0">
-                <a:ea typeface="Arial"/>
-                <a:cs typeface="Arial"/>
-                <a:sym typeface="Arial"/>
-              </a:rPr>
-              <a:t>For example, simple term counts</a:t>
-            </a:r>
-            <a:endParaRPr sz="2400" dirty="0"/>
-          </a:p>
-          <a:p>
-            <a:pPr>
-              <a:lnSpc>
-                <a:spcPct val="100000"/>
-              </a:lnSpc>
-              <a:buSzPts val="2040"/>
-              <a:buFont typeface="Arial"/>
-              <a:buChar char="•"/>
-            </a:pPr>
-            <a:r>
-              <a:rPr lang="en-US" sz="2400" dirty="0">
-                <a:ea typeface="Arial"/>
-                <a:cs typeface="Arial"/>
-                <a:sym typeface="Arial"/>
-              </a:rPr>
-              <a:t>Aggregate into a document-term matrix</a:t>
-            </a:r>
-            <a:endParaRPr sz="2400" dirty="0">
-              <a:ea typeface="Arial"/>
-              <a:cs typeface="Arial"/>
-              <a:sym typeface="Arial"/>
-            </a:endParaRPr>
-          </a:p>
-        </p:txBody>
-      </p:sp>
-      <p:pic>
-        <p:nvPicPr>
-          <p:cNvPr id="153" name="Google Shape;153;p21" descr="Screen Shot 2016-04-13 at 12.17.54 PM.png">
-            <a:extLst>
-              <a:ext uri="{FF2B5EF4-FFF2-40B4-BE49-F238E27FC236}">
-                <a16:creationId xmlns:a16="http://schemas.microsoft.com/office/drawing/2014/main" id="{1462D8CA-974D-5D3F-31D4-403A93E8C9D5}"/>
-              </a:ext>
-            </a:extLst>
-          </p:cNvPr>
-          <p:cNvPicPr preferRelativeResize="0"/>
-          <p:nvPr/>
-        </p:nvPicPr>
-        <p:blipFill rotWithShape="1">
-          <a:blip r:embed="rId3">
-            <a:alphaModFix/>
-          </a:blip>
-          <a:srcRect/>
-          <a:stretch/>
-        </p:blipFill>
-        <p:spPr>
-          <a:xfrm>
-            <a:off x="4953000" y="4059383"/>
-            <a:ext cx="4800600" cy="2094379"/>
-          </a:xfrm>
-          <a:prstGeom prst="rect">
-            <a:avLst/>
-          </a:prstGeom>
-          <a:noFill/>
-          <a:ln>
-            <a:noFill/>
-          </a:ln>
-        </p:spPr>
-      </p:pic>
-      <p:sp>
-        <p:nvSpPr>
-          <p:cNvPr id="2" name="Title 1">
-            <a:extLst>
-              <a:ext uri="{FF2B5EF4-FFF2-40B4-BE49-F238E27FC236}">
-                <a16:creationId xmlns:a16="http://schemas.microsoft.com/office/drawing/2014/main" id="{AE52A3B2-99F3-D35F-A526-2E5037C062B6}"/>
-              </a:ext>
-            </a:extLst>
-          </p:cNvPr>
-          <p:cNvSpPr txBox="1">
-            <a:spLocks/>
-          </p:cNvSpPr>
-          <p:nvPr/>
-        </p:nvSpPr>
-        <p:spPr>
-          <a:xfrm>
-            <a:off x="252919" y="1123837"/>
-            <a:ext cx="2947482" cy="4601183"/>
-          </a:xfrm>
-          <a:prstGeom prst="rect">
-            <a:avLst/>
-          </a:prstGeom>
-        </p:spPr>
-        <p:txBody>
-          <a:bodyPr vert="horz" lIns="91440" tIns="45720" rIns="91440" bIns="45720" rtlCol="0" anchor="ctr">
-            <a:normAutofit/>
-          </a:bodyPr>
-          <a:lstStyle>
-            <a:lvl1pPr algn="l" defTabSz="914400" rtl="0" eaLnBrk="1" latinLnBrk="0" hangingPunct="1">
-              <a:lnSpc>
-                <a:spcPct val="90000"/>
-              </a:lnSpc>
-              <a:spcBef>
-                <a:spcPct val="0"/>
-              </a:spcBef>
-              <a:buNone/>
-              <a:defRPr sz="3600" kern="1200" spc="-60" baseline="0">
-                <a:solidFill>
-                  <a:srgbClr val="FFFFFF"/>
-                </a:solidFill>
-                <a:latin typeface="+mj-lt"/>
-                <a:ea typeface="+mj-ea"/>
-                <a:cs typeface="+mj-cs"/>
-              </a:defRPr>
-            </a:lvl1pPr>
-          </a:lstStyle>
-          <a:p>
-            <a:r>
-              <a:rPr lang="en-US" dirty="0"/>
-              <a:t>“Bag of words” model</a:t>
-            </a:r>
-          </a:p>
-        </p:txBody>
-      </p:sp>
-    </p:spTree>
-    <p:extLst>
-      <p:ext uri="{BB962C8B-B14F-4D97-AF65-F5344CB8AC3E}">
-        <p14:creationId xmlns:p14="http://schemas.microsoft.com/office/powerpoint/2010/main" val="3368958431"/>
-      </p:ext>
-    </p:extLst>
-  </p:cSld>
-  <p:clrMapOvr>
-    <a:masterClrMapping/>
-  </p:clrMapOvr>
-</p:sld>
-</file>
-
-<file path=ppt/slides/slide8.xml><?xml version="1.0" encoding="utf-8"?>
-<p:sld xmlns:a="http://schemas.openxmlformats.org/drawingml/2006/main" xmlns:r="http://schemas.openxmlformats.org/officeDocument/2006/relationships" xmlns:p="http://schemas.openxmlformats.org/presentationml/2006/main">
-  <p:cSld>
-    <p:spTree>
-      <p:nvGrpSpPr>
-        <p:cNvPr id="1" name="Shape 157"/>
-        <p:cNvGrpSpPr/>
-        <p:nvPr/>
-      </p:nvGrpSpPr>
-      <p:grpSpPr>
-        <a:xfrm>
-          <a:off x="0" y="0"/>
-          <a:ext cx="0" cy="0"/>
-          <a:chOff x="0" y="0"/>
-          <a:chExt cx="0" cy="0"/>
-        </a:xfrm>
-      </p:grpSpPr>
-      <p:sp>
-        <p:nvSpPr>
-          <p:cNvPr id="159" name="Google Shape;159;p22"/>
-          <p:cNvSpPr txBox="1">
-            <a:spLocks noGrp="1"/>
-          </p:cNvSpPr>
-          <p:nvPr>
-            <p:ph type="body" idx="1"/>
-          </p:nvPr>
-        </p:nvSpPr>
-        <p:spPr>
-          <a:xfrm>
-            <a:off x="3463636" y="1069848"/>
-            <a:ext cx="4038600" cy="4718304"/>
-          </a:xfrm>
-          <a:prstGeom prst="rect">
-            <a:avLst/>
-          </a:prstGeom>
-          <a:noFill/>
-          <a:ln>
-            <a:noFill/>
-          </a:ln>
-        </p:spPr>
-        <p:txBody>
-          <a:bodyPr spcFirstLastPara="1" vert="horz" wrap="square" lIns="91425" tIns="45700" rIns="91425" bIns="45700" rtlCol="0" anchor="t" anchorCtr="0">
-            <a:noAutofit/>
-          </a:bodyPr>
-          <a:lstStyle/>
-          <a:p>
-            <a:pPr>
-              <a:lnSpc>
-                <a:spcPct val="100000"/>
-              </a:lnSpc>
-              <a:spcBef>
-                <a:spcPts val="0"/>
-              </a:spcBef>
-              <a:buSzPts val="1700"/>
-              <a:buFont typeface="Arial"/>
-              <a:buChar char="•"/>
-            </a:pPr>
-            <a:r>
-              <a:rPr lang="en-US" sz="2400" dirty="0">
-                <a:ea typeface="Arial"/>
-                <a:cs typeface="Arial"/>
-                <a:sym typeface="Arial"/>
-              </a:rPr>
-              <a:t>Recent history</a:t>
-            </a:r>
-            <a:endParaRPr sz="2400" dirty="0"/>
-          </a:p>
-          <a:p>
-            <a:pPr marL="457200" lvl="1" indent="-190500">
-              <a:lnSpc>
-                <a:spcPct val="100000"/>
-              </a:lnSpc>
-              <a:spcBef>
-                <a:spcPts val="1200"/>
-              </a:spcBef>
-              <a:spcAft>
-                <a:spcPts val="0"/>
-              </a:spcAft>
-              <a:buSzPts val="1530"/>
-              <a:buFont typeface="Merriweather Sans"/>
-              <a:buChar char="-"/>
-            </a:pPr>
-            <a:r>
-              <a:rPr lang="en-US" sz="2400" dirty="0">
-                <a:ea typeface="Arial"/>
-                <a:cs typeface="Arial"/>
-                <a:sym typeface="Arial"/>
-              </a:rPr>
-              <a:t>Initiatives by President Clinton</a:t>
-            </a:r>
-            <a:endParaRPr sz="2400" dirty="0"/>
-          </a:p>
-          <a:p>
-            <a:pPr marL="457200" lvl="1" indent="-190500">
-              <a:lnSpc>
-                <a:spcPct val="100000"/>
-              </a:lnSpc>
-              <a:spcBef>
-                <a:spcPts val="1200"/>
-              </a:spcBef>
-              <a:spcAft>
-                <a:spcPts val="0"/>
-              </a:spcAft>
-              <a:buSzPts val="1530"/>
-              <a:buFont typeface="Merriweather Sans"/>
-              <a:buChar char="-"/>
-            </a:pPr>
-            <a:r>
-              <a:rPr lang="en-US" sz="2400" dirty="0">
-                <a:ea typeface="Arial"/>
-                <a:cs typeface="Arial"/>
-                <a:sym typeface="Arial"/>
-              </a:rPr>
-              <a:t>Overhaul by President Obama</a:t>
-            </a:r>
-            <a:endParaRPr sz="2400" dirty="0"/>
-          </a:p>
-          <a:p>
-            <a:pPr>
-              <a:lnSpc>
-                <a:spcPct val="100000"/>
-              </a:lnSpc>
-              <a:buSzPts val="1700"/>
-              <a:buFont typeface="Arial"/>
-              <a:buChar char="•"/>
-            </a:pPr>
-            <a:r>
-              <a:rPr lang="en-US" sz="2400" dirty="0">
-                <a:ea typeface="Arial"/>
-                <a:cs typeface="Arial"/>
-                <a:sym typeface="Arial"/>
-              </a:rPr>
-              <a:t>Text data</a:t>
-            </a:r>
-            <a:endParaRPr sz="2400" dirty="0"/>
-          </a:p>
-          <a:p>
-            <a:pPr marL="457200" lvl="1" indent="-190500">
-              <a:lnSpc>
-                <a:spcPct val="100000"/>
-              </a:lnSpc>
-              <a:spcBef>
-                <a:spcPts val="1200"/>
-              </a:spcBef>
-              <a:spcAft>
-                <a:spcPts val="0"/>
-              </a:spcAft>
-              <a:buSzPts val="1530"/>
-              <a:buFont typeface="Merriweather Sans"/>
-              <a:buChar char="-"/>
-            </a:pPr>
-            <a:r>
-              <a:rPr lang="en-US" sz="2400" dirty="0">
-                <a:ea typeface="Arial"/>
-                <a:cs typeface="Arial"/>
-                <a:sym typeface="Arial"/>
-              </a:rPr>
-              <a:t>News articles</a:t>
-            </a:r>
-            <a:endParaRPr sz="2400" dirty="0"/>
-          </a:p>
-          <a:p>
-            <a:pPr marL="457200" lvl="1" indent="-190500">
-              <a:lnSpc>
-                <a:spcPct val="100000"/>
-              </a:lnSpc>
-              <a:spcBef>
-                <a:spcPts val="1200"/>
-              </a:spcBef>
-              <a:spcAft>
-                <a:spcPts val="0"/>
-              </a:spcAft>
-              <a:buSzPts val="1530"/>
-              <a:buFont typeface="Merriweather Sans"/>
-              <a:buChar char="-"/>
-            </a:pPr>
-            <a:r>
-              <a:rPr lang="en-US" sz="2400" dirty="0">
-                <a:ea typeface="Arial"/>
-                <a:cs typeface="Arial"/>
-                <a:sym typeface="Arial"/>
-              </a:rPr>
-              <a:t>Speech transcriptions</a:t>
-            </a:r>
-            <a:endParaRPr sz="2400" dirty="0"/>
-          </a:p>
-          <a:p>
-            <a:pPr marL="457200" lvl="1" indent="-190500">
-              <a:lnSpc>
-                <a:spcPct val="100000"/>
-              </a:lnSpc>
-              <a:spcBef>
-                <a:spcPts val="1200"/>
-              </a:spcBef>
-              <a:spcAft>
-                <a:spcPts val="0"/>
-              </a:spcAft>
-              <a:buSzPts val="1530"/>
-              <a:buFont typeface="Merriweather Sans"/>
-              <a:buChar char="-"/>
-            </a:pPr>
-            <a:r>
-              <a:rPr lang="en-US" sz="2400" dirty="0">
-                <a:ea typeface="Arial"/>
-                <a:cs typeface="Arial"/>
-                <a:sym typeface="Arial"/>
-              </a:rPr>
-              <a:t>Legal documents</a:t>
-            </a:r>
-            <a:endParaRPr sz="2400" dirty="0">
-              <a:ea typeface="Arial"/>
-              <a:cs typeface="Arial"/>
-              <a:sym typeface="Arial"/>
-            </a:endParaRPr>
-          </a:p>
-        </p:txBody>
-      </p:sp>
-      <p:pic>
-        <p:nvPicPr>
-          <p:cNvPr id="160" name="Google Shape;160;p22"/>
-          <p:cNvPicPr preferRelativeResize="0">
-            <a:picLocks noGrp="1"/>
-          </p:cNvPicPr>
-          <p:nvPr>
-            <p:ph type="body" idx="2"/>
-          </p:nvPr>
-        </p:nvPicPr>
-        <p:blipFill rotWithShape="1">
-          <a:blip r:embed="rId3">
-            <a:alphaModFix/>
-          </a:blip>
-          <a:srcRect t="1062" b="434"/>
-          <a:stretch/>
-        </p:blipFill>
-        <p:spPr>
-          <a:xfrm>
-            <a:off x="7654636" y="1069848"/>
-            <a:ext cx="4038600" cy="2983602"/>
-          </a:xfrm>
-          <a:prstGeom prst="rect">
-            <a:avLst/>
-          </a:prstGeom>
-          <a:noFill/>
-          <a:ln>
-            <a:noFill/>
-          </a:ln>
-        </p:spPr>
-      </p:pic>
-      <p:sp>
-        <p:nvSpPr>
-          <p:cNvPr id="161" name="Google Shape;161;p22"/>
-          <p:cNvSpPr/>
-          <p:nvPr/>
-        </p:nvSpPr>
-        <p:spPr>
-          <a:xfrm>
-            <a:off x="4301836" y="5725020"/>
-            <a:ext cx="6553200" cy="461665"/>
-          </a:xfrm>
-          <a:prstGeom prst="rect">
-            <a:avLst/>
-          </a:prstGeom>
-          <a:noFill/>
-          <a:ln>
-            <a:noFill/>
-          </a:ln>
-        </p:spPr>
-        <p:txBody>
-          <a:bodyPr spcFirstLastPara="1" wrap="square" lIns="91425" tIns="45700" rIns="91425" bIns="45700" anchor="t" anchorCtr="0">
-            <a:noAutofit/>
-          </a:bodyPr>
-          <a:lstStyle/>
-          <a:p>
-            <a:pPr algn="ctr"/>
-            <a:r>
-              <a:rPr lang="en-US" sz="2400" dirty="0">
-                <a:solidFill>
-                  <a:schemeClr val="tx1">
-                    <a:lumMod val="75000"/>
-                    <a:lumOff val="25000"/>
-                  </a:schemeClr>
-                </a:solidFill>
-                <a:ea typeface="Arial"/>
-                <a:cs typeface="Arial"/>
-                <a:sym typeface="Arial"/>
-              </a:rPr>
-              <a:t>What </a:t>
-            </a:r>
-            <a:r>
-              <a:rPr lang="en-US" sz="2400" b="1" dirty="0">
-                <a:solidFill>
-                  <a:schemeClr val="tx1">
-                    <a:lumMod val="75000"/>
-                    <a:lumOff val="25000"/>
-                  </a:schemeClr>
-                </a:solidFill>
-                <a:ea typeface="Arial"/>
-                <a:cs typeface="Arial"/>
-                <a:sym typeface="Arial"/>
-              </a:rPr>
-              <a:t>questions</a:t>
-            </a:r>
-            <a:r>
-              <a:rPr lang="en-US" sz="2400" dirty="0">
-                <a:solidFill>
-                  <a:schemeClr val="tx1">
-                    <a:lumMod val="75000"/>
-                    <a:lumOff val="25000"/>
-                  </a:schemeClr>
-                </a:solidFill>
-                <a:ea typeface="Arial"/>
-                <a:cs typeface="Arial"/>
-                <a:sym typeface="Arial"/>
-              </a:rPr>
-              <a:t> might you want to answer?</a:t>
-            </a:r>
-            <a:endParaRPr sz="2400" dirty="0">
-              <a:solidFill>
-                <a:schemeClr val="tx1">
-                  <a:lumMod val="75000"/>
-                  <a:lumOff val="25000"/>
-                </a:schemeClr>
-              </a:solidFill>
-              <a:ea typeface="Arial"/>
-              <a:cs typeface="Arial"/>
-              <a:sym typeface="Arial"/>
-            </a:endParaRPr>
-          </a:p>
-        </p:txBody>
-      </p:sp>
-      <p:sp>
-        <p:nvSpPr>
-          <p:cNvPr id="2" name="Title 1">
-            <a:extLst>
-              <a:ext uri="{FF2B5EF4-FFF2-40B4-BE49-F238E27FC236}">
-                <a16:creationId xmlns:a16="http://schemas.microsoft.com/office/drawing/2014/main" id="{DD00AB82-BAAD-2456-5B26-1A25B3AB7D58}"/>
-              </a:ext>
-            </a:extLst>
-          </p:cNvPr>
-          <p:cNvSpPr txBox="1">
-            <a:spLocks/>
-          </p:cNvSpPr>
-          <p:nvPr/>
-        </p:nvSpPr>
-        <p:spPr>
-          <a:xfrm>
-            <a:off x="252919" y="1123837"/>
-            <a:ext cx="2947482" cy="4601183"/>
-          </a:xfrm>
-          <a:prstGeom prst="rect">
-            <a:avLst/>
-          </a:prstGeom>
-        </p:spPr>
-        <p:txBody>
-          <a:bodyPr vert="horz" lIns="91440" tIns="45720" rIns="91440" bIns="45720" rtlCol="0" anchor="ctr">
-            <a:normAutofit/>
-          </a:bodyPr>
-          <a:lstStyle>
-            <a:lvl1pPr algn="l" defTabSz="914400" rtl="0" eaLnBrk="1" latinLnBrk="0" hangingPunct="1">
-              <a:lnSpc>
-                <a:spcPct val="90000"/>
-              </a:lnSpc>
-              <a:spcBef>
-                <a:spcPct val="0"/>
-              </a:spcBef>
-              <a:buNone/>
-              <a:defRPr sz="3600" kern="1200" spc="-60" baseline="0">
-                <a:solidFill>
-                  <a:srgbClr val="FFFFFF"/>
-                </a:solidFill>
-                <a:latin typeface="+mj-lt"/>
-                <a:ea typeface="+mj-ea"/>
-                <a:cs typeface="+mj-cs"/>
-              </a:defRPr>
-            </a:lvl1pPr>
-          </a:lstStyle>
-          <a:p>
-            <a:r>
-              <a:rPr lang="en-US" dirty="0"/>
-              <a:t>Example: health care reform</a:t>
-            </a:r>
-          </a:p>
-        </p:txBody>
-      </p:sp>
-    </p:spTree>
-  </p:cSld>
-  <p:clrMapOvr>
-    <a:masterClrMapping/>
-  </p:clrMapOvr>
-  <p:timing>
-    <p:tnLst>
-      <p:par>
-        <p:cTn id="1" dur="indefinite" restart="never" nodeType="tmRoot">
-          <p:childTnLst>
-            <p:seq concurrent="1" nextAc="seek">
-              <p:cTn id="2" dur="indefinite" nodeType="mainSeq">
-                <p:childTnLst>
-                  <p:par>
-                    <p:cTn id="3" fill="hold">
-                      <p:stCondLst>
-                        <p:cond delay="indefinite"/>
-                      </p:stCondLst>
-                      <p:childTnLst>
-                        <p:par>
-                          <p:cTn id="4" fill="hold">
-                            <p:stCondLst>
-                              <p:cond delay="0"/>
-                            </p:stCondLst>
-                            <p:childTnLst>
-                              <p:par>
-                                <p:cTn id="5" presetID="1" presetClass="entr" presetSubtype="0" fill="hold" nodeType="clickEffect">
-                                  <p:stCondLst>
-                                    <p:cond delay="0"/>
-                                  </p:stCondLst>
-                                  <p:childTnLst>
-                                    <p:set>
-                                      <p:cBhvr>
-                                        <p:cTn id="6" dur="1" fill="hold">
-                                          <p:stCondLst>
-                                            <p:cond delay="0"/>
-                                          </p:stCondLst>
-                                        </p:cTn>
-                                        <p:tgtEl>
-                                          <p:spTgt spid="161"/>
-                                        </p:tgtEl>
-                                        <p:attrNameLst>
-                                          <p:attrName>style.visibility</p:attrName>
-                                        </p:attrNameLst>
-                                      </p:cBhvr>
-                                      <p:to>
-                                        <p:strVal val="visible"/>
-                                      </p:to>
-                                    </p:set>
-                                  </p:childTnLst>
-                                </p:cTn>
-                              </p:par>
-                            </p:childTnLst>
-                          </p:cTn>
-                        </p:par>
-                      </p:childTnLst>
-                    </p:cTn>
-                  </p:par>
-                </p:childTnLst>
-              </p:cTn>
-              <p:prevCondLst>
-                <p:cond evt="onPrev" delay="0">
-                  <p:tgtEl>
-                    <p:sldTgt/>
-                  </p:tgtEl>
-                </p:cond>
-              </p:prevCondLst>
-              <p:nextCondLst>
-                <p:cond evt="onNext" delay="0">
-                  <p:tgtEl>
-                    <p:sldTgt/>
-                  </p:tgtEl>
-                </p:cond>
-              </p:nextCondLst>
-            </p:seq>
-          </p:childTnLst>
-        </p:cTn>
-      </p:par>
-    </p:tnLst>
-  </p:timing>
-</p:sld>
-</file>
-
-<file path=ppt/slides/slide9.xml><?xml version="1.0" encoding="utf-8"?>
-<p:sld xmlns:a="http://schemas.openxmlformats.org/drawingml/2006/main" xmlns:r="http://schemas.openxmlformats.org/officeDocument/2006/relationships" xmlns:p="http://schemas.openxmlformats.org/presentationml/2006/main">
-  <p:cSld>
-    <p:spTree>
-      <p:nvGrpSpPr>
-        <p:cNvPr id="1" name="Shape 165"/>
-        <p:cNvGrpSpPr/>
-        <p:nvPr/>
-      </p:nvGrpSpPr>
-      <p:grpSpPr>
-        <a:xfrm>
-          <a:off x="0" y="0"/>
-          <a:ext cx="0" cy="0"/>
-          <a:chOff x="0" y="0"/>
-          <a:chExt cx="0" cy="0"/>
-        </a:xfrm>
-      </p:grpSpPr>
-      <p:pic>
-        <p:nvPicPr>
-          <p:cNvPr id="167" name="Google Shape;167;p23"/>
-          <p:cNvPicPr preferRelativeResize="0">
-            <a:picLocks noGrp="1"/>
-          </p:cNvPicPr>
-          <p:nvPr>
-            <p:ph type="body" idx="1"/>
-          </p:nvPr>
-        </p:nvPicPr>
-        <p:blipFill rotWithShape="1">
-          <a:blip r:embed="rId3">
-            <a:alphaModFix/>
-          </a:blip>
-          <a:srcRect l="-3789" r="-4333"/>
-          <a:stretch/>
-        </p:blipFill>
-        <p:spPr>
-          <a:xfrm>
-            <a:off x="4716089" y="1123837"/>
-            <a:ext cx="5503031" cy="4876800"/>
-          </a:xfrm>
-          <a:prstGeom prst="rect">
-            <a:avLst/>
-          </a:prstGeom>
-          <a:noFill/>
-          <a:ln w="12700" cap="sq" cmpd="sng">
-            <a:solidFill>
-              <a:srgbClr val="000000"/>
-            </a:solidFill>
-            <a:prstDash val="solid"/>
-            <a:miter lim="8000"/>
-            <a:headEnd type="none" w="sm" len="sm"/>
-            <a:tailEnd type="none" w="sm" len="sm"/>
-          </a:ln>
-        </p:spPr>
-      </p:pic>
-      <p:sp>
-        <p:nvSpPr>
-          <p:cNvPr id="2" name="Title 1">
-            <a:extLst>
-              <a:ext uri="{FF2B5EF4-FFF2-40B4-BE49-F238E27FC236}">
-                <a16:creationId xmlns:a16="http://schemas.microsoft.com/office/drawing/2014/main" id="{041AF2CE-58C5-323B-096E-41D2B133B6E9}"/>
-              </a:ext>
-            </a:extLst>
-          </p:cNvPr>
-          <p:cNvSpPr txBox="1">
-            <a:spLocks/>
-          </p:cNvSpPr>
-          <p:nvPr/>
-        </p:nvSpPr>
-        <p:spPr>
-          <a:xfrm>
-            <a:off x="252919" y="1123837"/>
-            <a:ext cx="2947482" cy="4601183"/>
-          </a:xfrm>
-          <a:prstGeom prst="rect">
-            <a:avLst/>
-          </a:prstGeom>
-        </p:spPr>
-        <p:txBody>
-          <a:bodyPr vert="horz" lIns="91440" tIns="45720" rIns="91440" bIns="45720" rtlCol="0" anchor="ctr">
-            <a:normAutofit/>
-          </a:bodyPr>
-          <a:lstStyle>
-            <a:lvl1pPr algn="l" defTabSz="914400" rtl="0" eaLnBrk="1" latinLnBrk="0" hangingPunct="1">
-              <a:lnSpc>
-                <a:spcPct val="90000"/>
-              </a:lnSpc>
-              <a:spcBef>
-                <a:spcPct val="0"/>
-              </a:spcBef>
-              <a:buNone/>
-              <a:defRPr sz="3600" kern="1200" spc="-60" baseline="0">
-                <a:solidFill>
-                  <a:srgbClr val="FFFFFF"/>
-                </a:solidFill>
-                <a:latin typeface="+mj-lt"/>
-                <a:ea typeface="+mj-ea"/>
-                <a:cs typeface="+mj-cs"/>
-              </a:defRPr>
-            </a:lvl1pPr>
-          </a:lstStyle>
-          <a:p>
-            <a:r>
-              <a:rPr lang="en-US" dirty="0"/>
-              <a:t>A concrete example</a:t>
             </a:r>
           </a:p>
         </p:txBody>

--- a/slides/13-text.pptx
+++ b/slides/13-text.pptx
@@ -226,7 +226,7 @@
           <a:p>
             <a:fld id="{3CBB8A52-8AC5-C74C-97FB-632C448F3674}" type="datetimeFigureOut">
               <a:rPr lang="en-US" smtClean="0"/>
-              <a:t>12/1/25</a:t>
+              <a:t>12/4/25</a:t>
             </a:fld>
             <a:endParaRPr lang="en-US"/>
           </a:p>
@@ -3921,7 +3921,7 @@
             <a:fld id="{5586B75A-687E-405C-8A0B-8D00578BA2C3}" type="datetimeFigureOut">
               <a:rPr lang="en-US" smtClean="0"/>
               <a:pPr/>
-              <a:t>12/1/25</a:t>
+              <a:t>12/4/25</a:t>
             </a:fld>
             <a:endParaRPr lang="en-US" dirty="0"/>
           </a:p>
@@ -4093,7 +4093,7 @@
             <a:fld id="{5586B75A-687E-405C-8A0B-8D00578BA2C3}" type="datetimeFigureOut">
               <a:rPr lang="en-US" smtClean="0"/>
               <a:pPr/>
-              <a:t>12/1/25</a:t>
+              <a:t>12/4/25</a:t>
             </a:fld>
             <a:endParaRPr lang="en-US" dirty="0"/>
           </a:p>
@@ -4275,7 +4275,7 @@
             <a:fld id="{5586B75A-687E-405C-8A0B-8D00578BA2C3}" type="datetimeFigureOut">
               <a:rPr lang="en-US" smtClean="0"/>
               <a:pPr/>
-              <a:t>12/1/25</a:t>
+              <a:t>12/4/25</a:t>
             </a:fld>
             <a:endParaRPr lang="en-US" dirty="0"/>
           </a:p>
@@ -4447,7 +4447,7 @@
             <a:fld id="{5586B75A-687E-405C-8A0B-8D00578BA2C3}" type="datetimeFigureOut">
               <a:rPr lang="en-US" smtClean="0"/>
               <a:pPr/>
-              <a:t>12/1/25</a:t>
+              <a:t>12/4/25</a:t>
             </a:fld>
             <a:endParaRPr lang="en-US" dirty="0"/>
           </a:p>
@@ -4703,7 +4703,7 @@
             <a:fld id="{5586B75A-687E-405C-8A0B-8D00578BA2C3}" type="datetimeFigureOut">
               <a:rPr lang="en-US" smtClean="0"/>
               <a:pPr/>
-              <a:t>12/1/25</a:t>
+              <a:t>12/4/25</a:t>
             </a:fld>
             <a:endParaRPr lang="en-US" dirty="0"/>
           </a:p>
@@ -4993,7 +4993,7 @@
             <a:fld id="{5586B75A-687E-405C-8A0B-8D00578BA2C3}" type="datetimeFigureOut">
               <a:rPr lang="en-US" smtClean="0"/>
               <a:pPr/>
-              <a:t>12/1/25</a:t>
+              <a:t>12/4/25</a:t>
             </a:fld>
             <a:endParaRPr lang="en-US" dirty="0"/>
           </a:p>
@@ -5437,7 +5437,7 @@
             <a:fld id="{5586B75A-687E-405C-8A0B-8D00578BA2C3}" type="datetimeFigureOut">
               <a:rPr lang="en-US" smtClean="0"/>
               <a:pPr/>
-              <a:t>12/1/25</a:t>
+              <a:t>12/4/25</a:t>
             </a:fld>
             <a:endParaRPr lang="en-US" dirty="0"/>
           </a:p>
@@ -5557,7 +5557,7 @@
             <a:fld id="{5586B75A-687E-405C-8A0B-8D00578BA2C3}" type="datetimeFigureOut">
               <a:rPr lang="en-US" smtClean="0"/>
               <a:pPr/>
-              <a:t>12/1/25</a:t>
+              <a:t>12/4/25</a:t>
             </a:fld>
             <a:endParaRPr lang="en-US" dirty="0"/>
           </a:p>
@@ -5654,7 +5654,7 @@
             <a:fld id="{5586B75A-687E-405C-8A0B-8D00578BA2C3}" type="datetimeFigureOut">
               <a:rPr lang="en-US" smtClean="0"/>
               <a:pPr/>
-              <a:t>12/1/25</a:t>
+              <a:t>12/4/25</a:t>
             </a:fld>
             <a:endParaRPr lang="en-US" dirty="0"/>
           </a:p>
@@ -5944,7 +5944,7 @@
             <a:fld id="{5586B75A-687E-405C-8A0B-8D00578BA2C3}" type="datetimeFigureOut">
               <a:rPr lang="en-US" smtClean="0"/>
               <a:pPr/>
-              <a:t>12/1/25</a:t>
+              <a:t>12/4/25</a:t>
             </a:fld>
             <a:endParaRPr lang="en-US" dirty="0"/>
           </a:p>
@@ -6219,7 +6219,7 @@
             <a:fld id="{5586B75A-687E-405C-8A0B-8D00578BA2C3}" type="datetimeFigureOut">
               <a:rPr lang="en-US" smtClean="0"/>
               <a:pPr/>
-              <a:t>12/1/25</a:t>
+              <a:t>12/4/25</a:t>
             </a:fld>
             <a:endParaRPr lang="en-US" dirty="0"/>
           </a:p>
@@ -6532,7 +6532,7 @@
             <a:fld id="{5586B75A-687E-405C-8A0B-8D00578BA2C3}" type="datetimeFigureOut">
               <a:rPr lang="en-US" smtClean="0"/>
               <a:pPr/>
-              <a:t>12/1/25</a:t>
+              <a:t>12/4/25</a:t>
             </a:fld>
             <a:endParaRPr lang="en-US" dirty="0"/>
           </a:p>
@@ -10697,7 +10697,7 @@
               <a:buChar char="•"/>
             </a:pPr>
             <a:r>
-              <a:rPr lang="en-US" sz="2400" dirty="0">
+              <a:rPr lang="en-US" sz="2400" strike="sngStrike" dirty="0">
                 <a:cs typeface="Arial"/>
                 <a:sym typeface="Arial"/>
               </a:rPr>
@@ -12745,7 +12745,7 @@
 </file>
 
 <file path=ppt/slides/slide3.xml><?xml version="1.0" encoding="utf-8"?>
-<p:sld xmlns:a="http://schemas.openxmlformats.org/drawingml/2006/main" xmlns:r="http://schemas.openxmlformats.org/officeDocument/2006/relationships" xmlns:p="http://schemas.openxmlformats.org/presentationml/2006/main">
+<p:sld xmlns:a="http://schemas.openxmlformats.org/drawingml/2006/main" xmlns:r="http://schemas.openxmlformats.org/officeDocument/2006/relationships" xmlns:p="http://schemas.openxmlformats.org/presentationml/2006/main" show="0">
   <p:cSld>
     <p:spTree>
       <p:nvGrpSpPr>
@@ -13245,7 +13245,7 @@
 </file>
 
 <file path=ppt/slides/slide4.xml><?xml version="1.0" encoding="utf-8"?>
-<p:sld xmlns:a="http://schemas.openxmlformats.org/drawingml/2006/main" xmlns:r="http://schemas.openxmlformats.org/officeDocument/2006/relationships" xmlns:p="http://schemas.openxmlformats.org/presentationml/2006/main">
+<p:sld xmlns:a="http://schemas.openxmlformats.org/drawingml/2006/main" xmlns:r="http://schemas.openxmlformats.org/officeDocument/2006/relationships" xmlns:p="http://schemas.openxmlformats.org/presentationml/2006/main" show="0">
   <p:cSld>
     <p:spTree>
       <p:nvGrpSpPr>
@@ -13396,7 +13396,7 @@
 </file>
 
 <file path=ppt/slides/slide5.xml><?xml version="1.0" encoding="utf-8"?>
-<p:sld xmlns:a="http://schemas.openxmlformats.org/drawingml/2006/main" xmlns:r="http://schemas.openxmlformats.org/officeDocument/2006/relationships" xmlns:p="http://schemas.openxmlformats.org/presentationml/2006/main">
+<p:sld xmlns:a="http://schemas.openxmlformats.org/drawingml/2006/main" xmlns:r="http://schemas.openxmlformats.org/officeDocument/2006/relationships" xmlns:p="http://schemas.openxmlformats.org/presentationml/2006/main" show="0">
   <p:cSld>
     <p:spTree>
       <p:nvGrpSpPr>
